--- a/presentation data science.pptx
+++ b/presentation data science.pptx
@@ -215,7 +215,7 @@
           </a:lstStyle>
           <a:p>
             <a:fld id="{58B638C1-C41C-4A0E-8EBE-EBB16A7ED97E}" type="datetimeFigureOut">
-              <a:t>02/05/2026</a:t>
+              <a:t>06/05/2026</a:t>
             </a:fld>
             <a:endParaRPr lang="fr-FR"/>
           </a:p>
@@ -509,6 +509,13 @@
           </p:nvPr>
         </p:nvSpPr>
         <p:spPr/>
+        <p:txBody>
+          <a:bodyPr/>
+          <a:lstStyle/>
+          <a:p>
+            <a:endParaRPr lang="fr-FR"/>
+          </a:p>
+        </p:txBody>
       </p:sp>
       <p:sp>
         <p:nvSpPr>
@@ -605,6 +612,13 @@
           </p:nvPr>
         </p:nvSpPr>
         <p:spPr/>
+        <p:txBody>
+          <a:bodyPr/>
+          <a:lstStyle/>
+          <a:p>
+            <a:endParaRPr lang="fr-FR"/>
+          </a:p>
+        </p:txBody>
       </p:sp>
       <p:sp>
         <p:nvSpPr>
@@ -713,6 +727,13 @@
           </p:nvPr>
         </p:nvSpPr>
         <p:spPr/>
+        <p:txBody>
+          <a:bodyPr/>
+          <a:lstStyle/>
+          <a:p>
+            <a:endParaRPr lang="fr-FR"/>
+          </a:p>
+        </p:txBody>
       </p:sp>
       <p:sp>
         <p:nvSpPr>
@@ -809,6 +830,13 @@
           </p:nvPr>
         </p:nvSpPr>
         <p:spPr/>
+        <p:txBody>
+          <a:bodyPr/>
+          <a:lstStyle/>
+          <a:p>
+            <a:endParaRPr lang="fr-FR"/>
+          </a:p>
+        </p:txBody>
       </p:sp>
       <p:sp>
         <p:nvSpPr>
@@ -846,7 +874,7 @@
           <a:p>
             <a:fld id="{F7021451-1387-4CA6-816F-3879F97B5CBC}" type="slidenum">
               <a:rPr lang="en-US"/>
-              <a:t>13</a:t>
+              <a:t>12</a:t>
             </a:fld>
             <a:endParaRPr lang="en-US"/>
           </a:p>
@@ -893,6 +921,13 @@
           </p:nvPr>
         </p:nvSpPr>
         <p:spPr/>
+        <p:txBody>
+          <a:bodyPr/>
+          <a:lstStyle/>
+          <a:p>
+            <a:endParaRPr lang="fr-FR"/>
+          </a:p>
+        </p:txBody>
       </p:sp>
       <p:sp>
         <p:nvSpPr>
@@ -930,7 +965,7 @@
           <a:p>
             <a:fld id="{F7021451-1387-4CA6-816F-3879F97B5CBC}" type="slidenum">
               <a:rPr lang="en-US"/>
-              <a:t>14</a:t>
+              <a:t>13</a:t>
             </a:fld>
             <a:endParaRPr lang="en-US"/>
           </a:p>
@@ -977,6 +1012,13 @@
           </p:nvPr>
         </p:nvSpPr>
         <p:spPr/>
+        <p:txBody>
+          <a:bodyPr/>
+          <a:lstStyle/>
+          <a:p>
+            <a:endParaRPr lang="fr-FR"/>
+          </a:p>
+        </p:txBody>
       </p:sp>
       <p:sp>
         <p:nvSpPr>
@@ -1014,7 +1056,7 @@
           <a:p>
             <a:fld id="{F7021451-1387-4CA6-816F-3879F97B5CBC}" type="slidenum">
               <a:rPr lang="en-US"/>
-              <a:t>16</a:t>
+              <a:t>14</a:t>
             </a:fld>
             <a:endParaRPr lang="en-US"/>
           </a:p>
@@ -1061,6 +1103,13 @@
           </p:nvPr>
         </p:nvSpPr>
         <p:spPr/>
+        <p:txBody>
+          <a:bodyPr/>
+          <a:lstStyle/>
+          <a:p>
+            <a:endParaRPr lang="fr-FR"/>
+          </a:p>
+        </p:txBody>
       </p:sp>
       <p:sp>
         <p:nvSpPr>
@@ -1145,6 +1194,13 @@
           </p:nvPr>
         </p:nvSpPr>
         <p:spPr/>
+        <p:txBody>
+          <a:bodyPr/>
+          <a:lstStyle/>
+          <a:p>
+            <a:endParaRPr lang="fr-FR"/>
+          </a:p>
+        </p:txBody>
       </p:sp>
       <p:sp>
         <p:nvSpPr>
@@ -1241,6 +1297,13 @@
           </p:nvPr>
         </p:nvSpPr>
         <p:spPr/>
+        <p:txBody>
+          <a:bodyPr/>
+          <a:lstStyle/>
+          <a:p>
+            <a:endParaRPr lang="fr-FR"/>
+          </a:p>
+        </p:txBody>
       </p:sp>
       <p:sp>
         <p:nvSpPr>
@@ -1349,6 +1412,13 @@
           </p:nvPr>
         </p:nvSpPr>
         <p:spPr/>
+        <p:txBody>
+          <a:bodyPr/>
+          <a:lstStyle/>
+          <a:p>
+            <a:endParaRPr lang="fr-FR"/>
+          </a:p>
+        </p:txBody>
       </p:sp>
       <p:sp>
         <p:nvSpPr>
@@ -1445,6 +1515,13 @@
           </p:nvPr>
         </p:nvSpPr>
         <p:spPr/>
+        <p:txBody>
+          <a:bodyPr/>
+          <a:lstStyle/>
+          <a:p>
+            <a:endParaRPr lang="fr-FR"/>
+          </a:p>
+        </p:txBody>
       </p:sp>
       <p:sp>
         <p:nvSpPr>
@@ -1541,6 +1618,13 @@
           </p:nvPr>
         </p:nvSpPr>
         <p:spPr/>
+        <p:txBody>
+          <a:bodyPr/>
+          <a:lstStyle/>
+          <a:p>
+            <a:endParaRPr lang="fr-FR"/>
+          </a:p>
+        </p:txBody>
       </p:sp>
       <p:sp>
         <p:nvSpPr>
@@ -1637,6 +1721,13 @@
           </p:nvPr>
         </p:nvSpPr>
         <p:spPr/>
+        <p:txBody>
+          <a:bodyPr/>
+          <a:lstStyle/>
+          <a:p>
+            <a:endParaRPr lang="fr-FR"/>
+          </a:p>
+        </p:txBody>
       </p:sp>
       <p:sp>
         <p:nvSpPr>
@@ -1733,6 +1824,13 @@
           </p:nvPr>
         </p:nvSpPr>
         <p:spPr/>
+        <p:txBody>
+          <a:bodyPr/>
+          <a:lstStyle/>
+          <a:p>
+            <a:endParaRPr lang="fr-FR"/>
+          </a:p>
+        </p:txBody>
       </p:sp>
       <p:sp>
         <p:nvSpPr>
@@ -2166,6 +2264,13 @@
             <a:prstDash val="solid"/>
           </a:ln>
         </p:spPr>
+        <p:txBody>
+          <a:bodyPr/>
+          <a:lstStyle/>
+          <a:p>
+            <a:endParaRPr lang="fr-FR"/>
+          </a:p>
+        </p:txBody>
       </p:sp>
       <p:sp>
         <p:nvSpPr>
@@ -2211,7 +2316,7 @@
         </p:nvSpPr>
         <p:spPr>
           <a:xfrm>
-            <a:off x="685800" y="1600200"/>
+            <a:off x="685800" y="2366010"/>
             <a:ext cx="6309360" cy="914400"/>
           </a:xfrm>
           <a:prstGeom prst="rect">
@@ -2247,7 +2352,7 @@
         </p:nvSpPr>
         <p:spPr>
           <a:xfrm>
-            <a:off x="713232" y="2606040"/>
+            <a:off x="713232" y="3371850"/>
             <a:ext cx="6217920" cy="411480"/>
           </a:xfrm>
           <a:prstGeom prst="rect">
@@ -2344,42 +2449,6 @@
               <a:t>Projet Data Science — Support de soutenance</a:t>
             </a:r>
             <a:endParaRPr lang="en-US" sz="1000" dirty="0"/>
-          </a:p>
-        </p:txBody>
-      </p:sp>
-      <p:sp>
-        <p:nvSpPr>
-          <p:cNvPr id="20" name="Text 18"/>
-          <p:cNvSpPr/>
-          <p:nvPr/>
-        </p:nvSpPr>
-        <p:spPr>
-          <a:xfrm>
-            <a:off x="11201400" y="6446520"/>
-            <a:ext cx="640080" cy="182880"/>
-          </a:xfrm>
-          <a:prstGeom prst="rect">
-            <a:avLst/>
-          </a:prstGeom>
-          <a:noFill/>
-          <a:ln/>
-        </p:spPr>
-        <p:txBody>
-          <a:bodyPr wrap="square" lIns="0" tIns="0" rIns="0" bIns="0" rtlCol="0" anchor="ctr"/>
-          <a:lstStyle/>
-          <a:p>
-            <a:pPr marL="0" indent="0" algn="r">
-              <a:buNone/>
-            </a:pPr>
-            <a:r>
-              <a:rPr lang="en-US" sz="800" dirty="0">
-                <a:solidFill>
-                  <a:srgbClr val="64748B"/>
-                </a:solidFill>
-              </a:rPr>
-              <a:t>1/10</a:t>
-            </a:r>
-            <a:endParaRPr lang="en-US" sz="800" dirty="0"/>
           </a:p>
         </p:txBody>
       </p:sp>
@@ -2539,382 +2608,6 @@
       </p:sp>
       <p:sp>
         <p:nvSpPr>
-          <p:cNvPr id="19" name="Text 17">
-            <a:extLst>
-              <a:ext uri="{FF2B5EF4-FFF2-40B4-BE49-F238E27FC236}">
-                <a16:creationId xmlns:a16="http://schemas.microsoft.com/office/drawing/2014/main" id="{2CFC513B-546D-DFDC-F100-0535AC641464}"/>
-              </a:ext>
-            </a:extLst>
-          </p:cNvPr>
-          <p:cNvSpPr/>
-          <p:nvPr/>
-        </p:nvSpPr>
-        <p:spPr>
-          <a:xfrm>
-            <a:off x="11201400" y="6446520"/>
-            <a:ext cx="640080" cy="182880"/>
-          </a:xfrm>
-          <a:prstGeom prst="rect">
-            <a:avLst/>
-          </a:prstGeom>
-          <a:noFill/>
-          <a:ln/>
-        </p:spPr>
-        <p:txBody>
-          <a:bodyPr wrap="square" lIns="0" tIns="0" rIns="0" bIns="0" rtlCol="0" anchor="ctr"/>
-          <a:lstStyle/>
-          <a:p>
-            <a:pPr marL="0" indent="0" algn="r">
-              <a:buNone/>
-            </a:pPr>
-            <a:r>
-              <a:rPr lang="en-US" sz="800" dirty="0">
-                <a:solidFill>
-                  <a:srgbClr val="64748B"/>
-                </a:solidFill>
-              </a:rPr>
-              <a:t>5/10</a:t>
-            </a:r>
-            <a:endParaRPr lang="en-US" sz="800" dirty="0"/>
-          </a:p>
-        </p:txBody>
-      </p:sp>
-      <p:sp>
-        <p:nvSpPr>
-          <p:cNvPr id="21" name="Shape 19">
-            <a:extLst>
-              <a:ext uri="{FF2B5EF4-FFF2-40B4-BE49-F238E27FC236}">
-                <a16:creationId xmlns:a16="http://schemas.microsoft.com/office/drawing/2014/main" id="{7F5C73EF-ADBA-FBCC-E292-8FF08633EB1E}"/>
-              </a:ext>
-            </a:extLst>
-          </p:cNvPr>
-          <p:cNvSpPr/>
-          <p:nvPr/>
-        </p:nvSpPr>
-        <p:spPr>
-          <a:xfrm>
-            <a:off x="6141220" y="1380000"/>
-            <a:ext cx="5569208" cy="2516488"/>
-          </a:xfrm>
-          <a:prstGeom prst="roundRect">
-            <a:avLst>
-              <a:gd name="adj" fmla="val 5161"/>
-            </a:avLst>
-          </a:prstGeom>
-          <a:solidFill>
-            <a:srgbClr val="FFFBEB"/>
-          </a:solidFill>
-          <a:ln w="12700">
-            <a:solidFill>
-              <a:srgbClr val="FDE68A"/>
-            </a:solidFill>
-            <a:prstDash val="solid"/>
-          </a:ln>
-        </p:spPr>
-        <p:txBody>
-          <a:bodyPr/>
-          <a:lstStyle/>
-          <a:p>
-            <a:endParaRPr lang="fr-FR"/>
-          </a:p>
-        </p:txBody>
-      </p:sp>
-      <p:sp>
-        <p:nvSpPr>
-          <p:cNvPr id="23" name="Text 20">
-            <a:extLst>
-              <a:ext uri="{FF2B5EF4-FFF2-40B4-BE49-F238E27FC236}">
-                <a16:creationId xmlns:a16="http://schemas.microsoft.com/office/drawing/2014/main" id="{764B8417-49DF-E6CA-4768-D26240E5FDCA}"/>
-              </a:ext>
-            </a:extLst>
-          </p:cNvPr>
-          <p:cNvSpPr/>
-          <p:nvPr/>
-        </p:nvSpPr>
-        <p:spPr>
-          <a:xfrm>
-            <a:off x="6461260" y="1627000"/>
-            <a:ext cx="1961923" cy="482411"/>
-          </a:xfrm>
-          <a:prstGeom prst="rect">
-            <a:avLst/>
-          </a:prstGeom>
-          <a:noFill/>
-          <a:ln/>
-        </p:spPr>
-        <p:txBody>
-          <a:bodyPr wrap="square" lIns="0" tIns="0" rIns="0" bIns="0" rtlCol="0" anchor="ctr"/>
-          <a:lstStyle/>
-          <a:p>
-            <a:pPr marL="0" indent="0">
-              <a:buNone/>
-            </a:pPr>
-            <a:r>
-              <a:rPr lang="en-US" sz="1700" dirty="0" err="1">
-                <a:solidFill>
-                  <a:srgbClr val="92400E"/>
-                </a:solidFill>
-                <a:ea typeface="+mn-lt"/>
-                <a:cs typeface="+mn-lt"/>
-              </a:rPr>
-              <a:t>Avantages</a:t>
-            </a:r>
-            <a:endParaRPr lang="fr-FR" dirty="0" err="1"/>
-          </a:p>
-        </p:txBody>
-      </p:sp>
-      <p:sp>
-        <p:nvSpPr>
-          <p:cNvPr id="25" name="Text 21">
-            <a:extLst>
-              <a:ext uri="{FF2B5EF4-FFF2-40B4-BE49-F238E27FC236}">
-                <a16:creationId xmlns:a16="http://schemas.microsoft.com/office/drawing/2014/main" id="{3095BCE6-CAAB-C8C9-3386-C8FE598B699B}"/>
-              </a:ext>
-            </a:extLst>
-          </p:cNvPr>
-          <p:cNvSpPr/>
-          <p:nvPr/>
-        </p:nvSpPr>
-        <p:spPr>
-          <a:xfrm>
-            <a:off x="6461260" y="2100000"/>
-            <a:ext cx="1962981" cy="1327515"/>
-          </a:xfrm>
-          <a:prstGeom prst="rect">
-            <a:avLst/>
-          </a:prstGeom>
-          <a:noFill/>
-          <a:ln/>
-        </p:spPr>
-        <p:txBody>
-          <a:bodyPr wrap="square" lIns="0" tIns="0" rIns="0" bIns="0" rtlCol="0" anchor="ctr">
-            <a:normAutofit/>
-          </a:bodyPr>
-          <a:lstStyle/>
-          <a:p>
-            <a:pPr marL="285750" indent="-285750">
-              <a:buFont typeface="Calibri"/>
-              <a:buChar char="-"/>
-            </a:pPr>
-            <a:r>
-              <a:rPr lang="en-US" sz="1400">
-                <a:solidFill>
-                  <a:srgbClr val="0F172A"/>
-                </a:solidFill>
-                <a:ea typeface="+mn-lt"/>
-                <a:cs typeface="+mn-lt"/>
-              </a:rPr>
-              <a:t>Très performant</a:t>
-            </a:r>
-            <a:endParaRPr lang="fr-FR" sz="1400">
-              <a:solidFill>
-                <a:srgbClr val="000000"/>
-              </a:solidFill>
-              <a:ea typeface="+mn-lt"/>
-              <a:cs typeface="+mn-lt"/>
-            </a:endParaRPr>
-          </a:p>
-          <a:p>
-            <a:pPr marL="285750" indent="-285750">
-              <a:buFont typeface="Calibri"/>
-              <a:buChar char="-"/>
-            </a:pPr>
-            <a:r>
-              <a:rPr lang="en-US" sz="1400" dirty="0" err="1">
-                <a:solidFill>
-                  <a:srgbClr val="0F172A"/>
-                </a:solidFill>
-                <a:ea typeface="+mn-lt"/>
-                <a:cs typeface="+mn-lt"/>
-              </a:rPr>
-              <a:t>Corrige</a:t>
-            </a:r>
-            <a:r>
-              <a:rPr lang="en-US" sz="1400" dirty="0">
-                <a:solidFill>
-                  <a:srgbClr val="0F172A"/>
-                </a:solidFill>
-                <a:ea typeface="+mn-lt"/>
-                <a:cs typeface="+mn-lt"/>
-              </a:rPr>
-              <a:t> </a:t>
-            </a:r>
-            <a:r>
-              <a:rPr lang="en-US" sz="1400" dirty="0" err="1">
-                <a:solidFill>
-                  <a:srgbClr val="0F172A"/>
-                </a:solidFill>
-                <a:ea typeface="+mn-lt"/>
-                <a:cs typeface="+mn-lt"/>
-              </a:rPr>
-              <a:t>ses</a:t>
-            </a:r>
-            <a:r>
-              <a:rPr lang="en-US" sz="1400" dirty="0">
-                <a:solidFill>
-                  <a:srgbClr val="0F172A"/>
-                </a:solidFill>
-                <a:ea typeface="+mn-lt"/>
-                <a:cs typeface="+mn-lt"/>
-              </a:rPr>
-              <a:t> </a:t>
-            </a:r>
-            <a:r>
-              <a:rPr lang="en-US" sz="1400" dirty="0" err="1">
-                <a:solidFill>
-                  <a:srgbClr val="0F172A"/>
-                </a:solidFill>
-                <a:ea typeface="+mn-lt"/>
-                <a:cs typeface="+mn-lt"/>
-              </a:rPr>
-              <a:t>erreurs</a:t>
-            </a:r>
-            <a:endParaRPr lang="en-US" sz="1400">
-              <a:solidFill>
-                <a:srgbClr val="0F172A"/>
-              </a:solidFill>
-              <a:ea typeface="+mn-lt"/>
-              <a:cs typeface="+mn-lt"/>
-            </a:endParaRPr>
-          </a:p>
-          <a:p>
-            <a:pPr marL="285750" indent="-285750">
-              <a:buFont typeface="Calibri"/>
-              <a:buChar char="-"/>
-            </a:pPr>
-            <a:r>
-              <a:rPr lang="en-US" sz="1400" dirty="0" err="1">
-                <a:solidFill>
-                  <a:srgbClr val="0F172A"/>
-                </a:solidFill>
-                <a:ea typeface="+mn-lt"/>
-                <a:cs typeface="+mn-lt"/>
-              </a:rPr>
-              <a:t>Capte</a:t>
-            </a:r>
-            <a:r>
-              <a:rPr lang="en-US" sz="1400" dirty="0">
-                <a:solidFill>
-                  <a:srgbClr val="0F172A"/>
-                </a:solidFill>
-                <a:ea typeface="+mn-lt"/>
-                <a:cs typeface="+mn-lt"/>
-              </a:rPr>
-              <a:t> des relations complexes</a:t>
-            </a:r>
-          </a:p>
-          <a:p>
-            <a:pPr marL="285750" indent="-285750">
-              <a:buFont typeface="Calibri"/>
-              <a:buChar char="-"/>
-            </a:pPr>
-            <a:endParaRPr lang="en-US" sz="1400" dirty="0">
-              <a:solidFill>
-                <a:srgbClr val="0F172A"/>
-              </a:solidFill>
-              <a:ea typeface="+mn-lt"/>
-              <a:cs typeface="+mn-lt"/>
-            </a:endParaRPr>
-          </a:p>
-        </p:txBody>
-      </p:sp>
-      <p:sp>
-        <p:nvSpPr>
-          <p:cNvPr id="26" name="Text 20">
-            <a:extLst>
-              <a:ext uri="{FF2B5EF4-FFF2-40B4-BE49-F238E27FC236}">
-                <a16:creationId xmlns:a16="http://schemas.microsoft.com/office/drawing/2014/main" id="{C1CED895-564C-2EA1-AD6A-A960CECB2BFB}"/>
-              </a:ext>
-            </a:extLst>
-          </p:cNvPr>
-          <p:cNvSpPr/>
-          <p:nvPr/>
-        </p:nvSpPr>
-        <p:spPr>
-          <a:xfrm>
-            <a:off x="9447684" y="1627000"/>
-            <a:ext cx="1961923" cy="482411"/>
-          </a:xfrm>
-          <a:prstGeom prst="rect">
-            <a:avLst/>
-          </a:prstGeom>
-          <a:noFill/>
-          <a:ln/>
-        </p:spPr>
-        <p:txBody>
-          <a:bodyPr wrap="square" lIns="0" tIns="0" rIns="0" bIns="0" rtlCol="0" anchor="ctr"/>
-          <a:lstStyle/>
-          <a:p>
-            <a:pPr marL="0" indent="0">
-              <a:buNone/>
-            </a:pPr>
-            <a:r>
-              <a:rPr lang="en-US" sz="1700" dirty="0" err="1">
-                <a:solidFill>
-                  <a:srgbClr val="92400E"/>
-                </a:solidFill>
-                <a:ea typeface="+mn-lt"/>
-                <a:cs typeface="+mn-lt"/>
-              </a:rPr>
-              <a:t>Inconvéniants</a:t>
-            </a:r>
-            <a:endParaRPr lang="fr-FR" dirty="0" err="1"/>
-          </a:p>
-        </p:txBody>
-      </p:sp>
-      <p:sp>
-        <p:nvSpPr>
-          <p:cNvPr id="27" name="Text 21">
-            <a:extLst>
-              <a:ext uri="{FF2B5EF4-FFF2-40B4-BE49-F238E27FC236}">
-                <a16:creationId xmlns:a16="http://schemas.microsoft.com/office/drawing/2014/main" id="{F50A00D2-F36E-5E2E-8CAA-B087B22FE1F2}"/>
-              </a:ext>
-            </a:extLst>
-          </p:cNvPr>
-          <p:cNvSpPr/>
-          <p:nvPr/>
-        </p:nvSpPr>
-        <p:spPr>
-          <a:xfrm>
-            <a:off x="9286047" y="1980000"/>
-            <a:ext cx="1962981" cy="1327515"/>
-          </a:xfrm>
-          <a:prstGeom prst="rect">
-            <a:avLst/>
-          </a:prstGeom>
-          <a:noFill/>
-          <a:ln/>
-        </p:spPr>
-        <p:txBody>
-          <a:bodyPr wrap="square" lIns="0" tIns="0" rIns="0" bIns="0" rtlCol="0" anchor="ctr">
-            <a:normAutofit/>
-          </a:bodyPr>
-          <a:lstStyle/>
-          <a:p>
-            <a:pPr marL="285750" indent="-285750">
-              <a:buFont typeface="Calibri"/>
-              <a:buChar char="-"/>
-            </a:pPr>
-            <a:r>
-              <a:rPr lang="en-US" sz="1400">
-                <a:solidFill>
-                  <a:srgbClr val="0F172A"/>
-                </a:solidFill>
-                <a:ea typeface="+mn-lt"/>
-                <a:cs typeface="+mn-lt"/>
-              </a:rPr>
-              <a:t>overfitting</a:t>
-            </a:r>
-            <a:endParaRPr lang="fr-FR" sz="1400">
-              <a:solidFill>
-                <a:srgbClr val="000000"/>
-              </a:solidFill>
-            </a:endParaRPr>
-          </a:p>
-        </p:txBody>
-      </p:sp>
-      <p:sp>
-        <p:nvSpPr>
           <p:cNvPr id="9" name="Shape 9">
             <a:extLst>
               <a:ext uri="{FF2B5EF4-FFF2-40B4-BE49-F238E27FC236}">
@@ -2928,7 +2621,7 @@
         <p:spPr>
           <a:xfrm>
             <a:off x="685800" y="1500000"/>
-            <a:ext cx="2240280" cy="2240280"/>
+            <a:ext cx="2354580" cy="2240280"/>
           </a:xfrm>
           <a:prstGeom prst="roundRect">
             <a:avLst>
@@ -3185,7 +2878,7 @@
         </p:nvSpPr>
         <p:spPr>
           <a:xfrm>
-            <a:off x="6550000" y="4334614"/>
+            <a:off x="6264250" y="4323184"/>
             <a:ext cx="5011860" cy="1856600"/>
           </a:xfrm>
           <a:prstGeom prst="roundRect">
@@ -3257,6 +2950,234 @@
           </a:p>
         </p:txBody>
       </p:sp>
+      <p:graphicFrame>
+        <p:nvGraphicFramePr>
+          <p:cNvPr id="6" name="Tableau 5">
+            <a:extLst>
+              <a:ext uri="{FF2B5EF4-FFF2-40B4-BE49-F238E27FC236}">
+                <a16:creationId xmlns:a16="http://schemas.microsoft.com/office/drawing/2014/main" id="{368F1B78-264F-A5A5-C7DC-DE8870FB5FF2}"/>
+              </a:ext>
+            </a:extLst>
+          </p:cNvPr>
+          <p:cNvGraphicFramePr>
+            <a:graphicFrameLocks noGrp="1"/>
+          </p:cNvGraphicFramePr>
+          <p:nvPr>
+            <p:extLst>
+              <p:ext uri="{D42A27DB-BD31-4B8C-83A1-F6EECF244321}">
+                <p14:modId xmlns:p14="http://schemas.microsoft.com/office/powerpoint/2010/main" val="2482635147"/>
+              </p:ext>
+            </p:extLst>
+          </p:nvPr>
+        </p:nvGraphicFramePr>
+        <p:xfrm>
+          <a:off x="5776326" y="1846250"/>
+          <a:ext cx="6030864" cy="1437640"/>
+        </p:xfrm>
+        <a:graphic>
+          <a:graphicData uri="http://schemas.openxmlformats.org/drawingml/2006/table">
+            <a:tbl>
+              <a:tblPr firstRow="1" bandRow="1">
+                <a:tableStyleId>{073A0DAA-6AF3-43AB-8588-CEC1D06C72B9}</a:tableStyleId>
+              </a:tblPr>
+              <a:tblGrid>
+                <a:gridCol w="3015432">
+                  <a:extLst>
+                    <a:ext uri="{9D8B030D-6E8A-4147-A177-3AD203B41FA5}">
+                      <a16:colId xmlns:a16="http://schemas.microsoft.com/office/drawing/2014/main" val="3095843017"/>
+                    </a:ext>
+                  </a:extLst>
+                </a:gridCol>
+                <a:gridCol w="3015432">
+                  <a:extLst>
+                    <a:ext uri="{9D8B030D-6E8A-4147-A177-3AD203B41FA5}">
+                      <a16:colId xmlns:a16="http://schemas.microsoft.com/office/drawing/2014/main" val="1561732748"/>
+                    </a:ext>
+                  </a:extLst>
+                </a:gridCol>
+              </a:tblGrid>
+              <a:tr h="370840">
+                <a:tc>
+                  <a:txBody>
+                    <a:bodyPr/>
+                    <a:lstStyle/>
+                    <a:p>
+                      <a:r>
+                        <a:rPr lang="fr-FR" dirty="0"/>
+                        <a:t>Avantages</a:t>
+                      </a:r>
+                    </a:p>
+                  </a:txBody>
+                  <a:tcPr/>
+                </a:tc>
+                <a:tc>
+                  <a:txBody>
+                    <a:bodyPr/>
+                    <a:lstStyle/>
+                    <a:p>
+                      <a:r>
+                        <a:rPr lang="en-US" sz="1800" dirty="0">
+                          <a:solidFill>
+                            <a:schemeClr val="bg1"/>
+                          </a:solidFill>
+                          <a:ea typeface="+mn-lt"/>
+                          <a:cs typeface="+mn-lt"/>
+                        </a:rPr>
+                        <a:t>Inconvénient</a:t>
+                      </a:r>
+                      <a:endParaRPr lang="fr-FR" dirty="0">
+                        <a:solidFill>
+                          <a:schemeClr val="bg1"/>
+                        </a:solidFill>
+                      </a:endParaRPr>
+                    </a:p>
+                  </a:txBody>
+                  <a:tcPr/>
+                </a:tc>
+                <a:extLst>
+                  <a:ext uri="{0D108BD9-81ED-4DB2-BD59-A6C34878D82A}">
+                    <a16:rowId xmlns:a16="http://schemas.microsoft.com/office/drawing/2014/main" val="3615889654"/>
+                  </a:ext>
+                </a:extLst>
+              </a:tr>
+              <a:tr h="370840">
+                <a:tc>
+                  <a:txBody>
+                    <a:bodyPr/>
+                    <a:lstStyle/>
+                    <a:p>
+                      <a:pPr marL="285750" indent="-285750">
+                        <a:buFont typeface="Calibri"/>
+                        <a:buChar char="-"/>
+                      </a:pPr>
+                      <a:r>
+                        <a:rPr lang="en-US" sz="1600" dirty="0">
+                          <a:solidFill>
+                            <a:srgbClr val="0F172A"/>
+                          </a:solidFill>
+                          <a:ea typeface="+mn-lt"/>
+                          <a:cs typeface="+mn-lt"/>
+                        </a:rPr>
+                        <a:t>Très performant</a:t>
+                      </a:r>
+                      <a:endParaRPr lang="fr-FR" sz="1600" dirty="0">
+                        <a:solidFill>
+                          <a:srgbClr val="000000"/>
+                        </a:solidFill>
+                        <a:ea typeface="+mn-lt"/>
+                        <a:cs typeface="+mn-lt"/>
+                      </a:endParaRPr>
+                    </a:p>
+                    <a:p>
+                      <a:pPr marL="285750" indent="-285750">
+                        <a:buFont typeface="Calibri"/>
+                        <a:buChar char="-"/>
+                      </a:pPr>
+                      <a:r>
+                        <a:rPr lang="en-US" sz="1600" dirty="0">
+                          <a:solidFill>
+                            <a:srgbClr val="0F172A"/>
+                          </a:solidFill>
+                          <a:ea typeface="+mn-lt"/>
+                          <a:cs typeface="+mn-lt"/>
+                        </a:rPr>
+                        <a:t>Corrige </a:t>
+                      </a:r>
+                      <a:r>
+                        <a:rPr lang="en-US" sz="1600" dirty="0" err="1">
+                          <a:solidFill>
+                            <a:srgbClr val="0F172A"/>
+                          </a:solidFill>
+                          <a:ea typeface="+mn-lt"/>
+                          <a:cs typeface="+mn-lt"/>
+                        </a:rPr>
+                        <a:t>ses</a:t>
+                      </a:r>
+                      <a:r>
+                        <a:rPr lang="en-US" sz="1600" dirty="0">
+                          <a:solidFill>
+                            <a:srgbClr val="0F172A"/>
+                          </a:solidFill>
+                          <a:ea typeface="+mn-lt"/>
+                          <a:cs typeface="+mn-lt"/>
+                        </a:rPr>
+                        <a:t> </a:t>
+                      </a:r>
+                      <a:r>
+                        <a:rPr lang="en-US" sz="1600" dirty="0" err="1">
+                          <a:solidFill>
+                            <a:srgbClr val="0F172A"/>
+                          </a:solidFill>
+                          <a:ea typeface="+mn-lt"/>
+                          <a:cs typeface="+mn-lt"/>
+                        </a:rPr>
+                        <a:t>erreurs</a:t>
+                      </a:r>
+                      <a:endParaRPr lang="en-US" sz="1600" dirty="0">
+                        <a:solidFill>
+                          <a:srgbClr val="0F172A"/>
+                        </a:solidFill>
+                        <a:ea typeface="+mn-lt"/>
+                        <a:cs typeface="+mn-lt"/>
+                      </a:endParaRPr>
+                    </a:p>
+                    <a:p>
+                      <a:pPr marL="285750" indent="-285750">
+                        <a:buFont typeface="Calibri"/>
+                        <a:buChar char="-"/>
+                      </a:pPr>
+                      <a:r>
+                        <a:rPr lang="en-US" sz="1600" dirty="0" err="1">
+                          <a:solidFill>
+                            <a:srgbClr val="0F172A"/>
+                          </a:solidFill>
+                          <a:ea typeface="+mn-lt"/>
+                          <a:cs typeface="+mn-lt"/>
+                        </a:rPr>
+                        <a:t>Capte</a:t>
+                      </a:r>
+                      <a:r>
+                        <a:rPr lang="en-US" sz="1600" dirty="0">
+                          <a:solidFill>
+                            <a:srgbClr val="0F172A"/>
+                          </a:solidFill>
+                          <a:ea typeface="+mn-lt"/>
+                          <a:cs typeface="+mn-lt"/>
+                        </a:rPr>
+                        <a:t> des relations complexes</a:t>
+                      </a:r>
+                    </a:p>
+                  </a:txBody>
+                  <a:tcPr/>
+                </a:tc>
+                <a:tc>
+                  <a:txBody>
+                    <a:bodyPr/>
+                    <a:lstStyle/>
+                    <a:p>
+                      <a:r>
+                        <a:rPr lang="fr-FR" sz="1600" dirty="0"/>
+                        <a:t>- </a:t>
+                      </a:r>
+                      <a:r>
+                        <a:rPr lang="fr-FR" sz="1600" dirty="0" err="1"/>
+                        <a:t>Overfitting</a:t>
+                      </a:r>
+                      <a:endParaRPr lang="fr-FR" sz="1600" dirty="0"/>
+                    </a:p>
+                  </a:txBody>
+                  <a:tcPr/>
+                </a:tc>
+                <a:extLst>
+                  <a:ext uri="{0D108BD9-81ED-4DB2-BD59-A6C34878D82A}">
+                    <a16:rowId xmlns:a16="http://schemas.microsoft.com/office/drawing/2014/main" val="628995668"/>
+                  </a:ext>
+                </a:extLst>
+              </a:tr>
+            </a:tbl>
+          </a:graphicData>
+        </a:graphic>
+      </p:graphicFrame>
     </p:spTree>
     <p:extLst>
       <p:ext uri="{BB962C8B-B14F-4D97-AF65-F5344CB8AC3E}">
@@ -3418,364 +3339,6 @@
       </p:sp>
       <p:sp>
         <p:nvSpPr>
-          <p:cNvPr id="19" name="Text 17">
-            <a:extLst>
-              <a:ext uri="{FF2B5EF4-FFF2-40B4-BE49-F238E27FC236}">
-                <a16:creationId xmlns:a16="http://schemas.microsoft.com/office/drawing/2014/main" id="{F64868AA-BC9D-819B-2624-9F909FFD4D31}"/>
-              </a:ext>
-            </a:extLst>
-          </p:cNvPr>
-          <p:cNvSpPr/>
-          <p:nvPr/>
-        </p:nvSpPr>
-        <p:spPr>
-          <a:xfrm>
-            <a:off x="11201400" y="6446520"/>
-            <a:ext cx="640080" cy="182880"/>
-          </a:xfrm>
-          <a:prstGeom prst="rect">
-            <a:avLst/>
-          </a:prstGeom>
-          <a:noFill/>
-          <a:ln/>
-        </p:spPr>
-        <p:txBody>
-          <a:bodyPr wrap="square" lIns="0" tIns="0" rIns="0" bIns="0" rtlCol="0" anchor="ctr"/>
-          <a:lstStyle/>
-          <a:p>
-            <a:pPr marL="0" indent="0" algn="r">
-              <a:buNone/>
-            </a:pPr>
-            <a:r>
-              <a:rPr lang="en-US" sz="800" dirty="0">
-                <a:solidFill>
-                  <a:srgbClr val="64748B"/>
-                </a:solidFill>
-              </a:rPr>
-              <a:t>5/10</a:t>
-            </a:r>
-            <a:endParaRPr lang="en-US" sz="800" dirty="0"/>
-          </a:p>
-        </p:txBody>
-      </p:sp>
-      <p:sp>
-        <p:nvSpPr>
-          <p:cNvPr id="21" name="Shape 19">
-            <a:extLst>
-              <a:ext uri="{FF2B5EF4-FFF2-40B4-BE49-F238E27FC236}">
-                <a16:creationId xmlns:a16="http://schemas.microsoft.com/office/drawing/2014/main" id="{54141BD1-85FD-C819-3475-A6C186CF84C0}"/>
-              </a:ext>
-            </a:extLst>
-          </p:cNvPr>
-          <p:cNvSpPr/>
-          <p:nvPr/>
-        </p:nvSpPr>
-        <p:spPr>
-          <a:xfrm>
-            <a:off x="6141220" y="1380000"/>
-            <a:ext cx="5569208" cy="2516488"/>
-          </a:xfrm>
-          <a:prstGeom prst="roundRect">
-            <a:avLst>
-              <a:gd name="adj" fmla="val 5161"/>
-            </a:avLst>
-          </a:prstGeom>
-          <a:solidFill>
-            <a:srgbClr val="FFFBEB"/>
-          </a:solidFill>
-          <a:ln w="12700">
-            <a:solidFill>
-              <a:srgbClr val="FDE68A"/>
-            </a:solidFill>
-            <a:prstDash val="solid"/>
-          </a:ln>
-        </p:spPr>
-        <p:txBody>
-          <a:bodyPr/>
-          <a:lstStyle/>
-          <a:p>
-            <a:endParaRPr lang="fr-FR"/>
-          </a:p>
-        </p:txBody>
-      </p:sp>
-      <p:sp>
-        <p:nvSpPr>
-          <p:cNvPr id="23" name="Text 20">
-            <a:extLst>
-              <a:ext uri="{FF2B5EF4-FFF2-40B4-BE49-F238E27FC236}">
-                <a16:creationId xmlns:a16="http://schemas.microsoft.com/office/drawing/2014/main" id="{EB3EE2E1-DE21-9324-67D3-20A4536D88D7}"/>
-              </a:ext>
-            </a:extLst>
-          </p:cNvPr>
-          <p:cNvSpPr/>
-          <p:nvPr/>
-        </p:nvSpPr>
-        <p:spPr>
-          <a:xfrm>
-            <a:off x="6461260" y="1627000"/>
-            <a:ext cx="1961923" cy="482411"/>
-          </a:xfrm>
-          <a:prstGeom prst="rect">
-            <a:avLst/>
-          </a:prstGeom>
-          <a:noFill/>
-          <a:ln/>
-        </p:spPr>
-        <p:txBody>
-          <a:bodyPr wrap="square" lIns="0" tIns="0" rIns="0" bIns="0" rtlCol="0" anchor="ctr"/>
-          <a:lstStyle/>
-          <a:p>
-            <a:pPr marL="0" indent="0">
-              <a:buNone/>
-            </a:pPr>
-            <a:r>
-              <a:rPr lang="en-US" sz="1700" dirty="0" err="1">
-                <a:solidFill>
-                  <a:srgbClr val="92400E"/>
-                </a:solidFill>
-                <a:ea typeface="+mn-lt"/>
-                <a:cs typeface="+mn-lt"/>
-              </a:rPr>
-              <a:t>Avantages</a:t>
-            </a:r>
-            <a:endParaRPr lang="fr-FR" dirty="0" err="1"/>
-          </a:p>
-        </p:txBody>
-      </p:sp>
-      <p:sp>
-        <p:nvSpPr>
-          <p:cNvPr id="25" name="Text 21">
-            <a:extLst>
-              <a:ext uri="{FF2B5EF4-FFF2-40B4-BE49-F238E27FC236}">
-                <a16:creationId xmlns:a16="http://schemas.microsoft.com/office/drawing/2014/main" id="{1B0B0027-8339-90DB-ADD3-1B8E0E624522}"/>
-              </a:ext>
-            </a:extLst>
-          </p:cNvPr>
-          <p:cNvSpPr/>
-          <p:nvPr/>
-        </p:nvSpPr>
-        <p:spPr>
-          <a:xfrm>
-            <a:off x="6461260" y="2100000"/>
-            <a:ext cx="2354096" cy="1327515"/>
-          </a:xfrm>
-          <a:prstGeom prst="rect">
-            <a:avLst/>
-          </a:prstGeom>
-          <a:noFill/>
-          <a:ln/>
-        </p:spPr>
-        <p:txBody>
-          <a:bodyPr wrap="square" lIns="0" tIns="0" rIns="0" bIns="0" rtlCol="0" anchor="ctr">
-            <a:normAutofit/>
-          </a:bodyPr>
-          <a:lstStyle/>
-          <a:p>
-            <a:pPr marL="285750" indent="-285750">
-              <a:buFont typeface="Calibri"/>
-              <a:buChar char="-"/>
-            </a:pPr>
-            <a:r>
-              <a:rPr lang="en-US" sz="1400" dirty="0" err="1">
-                <a:solidFill>
-                  <a:srgbClr val="0F172A"/>
-                </a:solidFill>
-                <a:ea typeface="+mn-lt"/>
-                <a:cs typeface="+mn-lt"/>
-              </a:rPr>
-              <a:t>Capte</a:t>
-            </a:r>
-            <a:r>
-              <a:rPr lang="en-US" sz="1400" dirty="0">
-                <a:solidFill>
-                  <a:srgbClr val="0F172A"/>
-                </a:solidFill>
-                <a:ea typeface="+mn-lt"/>
-                <a:cs typeface="+mn-lt"/>
-              </a:rPr>
-              <a:t> des interactions complexes</a:t>
-            </a:r>
-          </a:p>
-          <a:p>
-            <a:pPr marL="285750" indent="-285750">
-              <a:buFont typeface="Calibri"/>
-              <a:buChar char="-"/>
-            </a:pPr>
-            <a:r>
-              <a:rPr lang="en-US" sz="1400">
-                <a:solidFill>
-                  <a:srgbClr val="0F172A"/>
-                </a:solidFill>
-                <a:ea typeface="+mn-lt"/>
-                <a:cs typeface="+mn-lt"/>
-              </a:rPr>
-              <a:t>Flexible</a:t>
-            </a:r>
-            <a:endParaRPr lang="en-US" sz="1400">
-              <a:solidFill>
-                <a:srgbClr val="0F172A"/>
-              </a:solidFill>
-            </a:endParaRPr>
-          </a:p>
-        </p:txBody>
-      </p:sp>
-      <p:sp>
-        <p:nvSpPr>
-          <p:cNvPr id="26" name="Text 20">
-            <a:extLst>
-              <a:ext uri="{FF2B5EF4-FFF2-40B4-BE49-F238E27FC236}">
-                <a16:creationId xmlns:a16="http://schemas.microsoft.com/office/drawing/2014/main" id="{2682B711-F9DB-5933-74CA-076D1E16046B}"/>
-              </a:ext>
-            </a:extLst>
-          </p:cNvPr>
-          <p:cNvSpPr/>
-          <p:nvPr/>
-        </p:nvSpPr>
-        <p:spPr>
-          <a:xfrm>
-            <a:off x="9447684" y="1627000"/>
-            <a:ext cx="1961923" cy="482411"/>
-          </a:xfrm>
-          <a:prstGeom prst="rect">
-            <a:avLst/>
-          </a:prstGeom>
-          <a:noFill/>
-          <a:ln/>
-        </p:spPr>
-        <p:txBody>
-          <a:bodyPr wrap="square" lIns="0" tIns="0" rIns="0" bIns="0" rtlCol="0" anchor="ctr"/>
-          <a:lstStyle/>
-          <a:p>
-            <a:pPr marL="0" indent="0">
-              <a:buNone/>
-            </a:pPr>
-            <a:r>
-              <a:rPr lang="en-US" sz="1700" dirty="0" err="1">
-                <a:solidFill>
-                  <a:srgbClr val="92400E"/>
-                </a:solidFill>
-                <a:ea typeface="+mn-lt"/>
-                <a:cs typeface="+mn-lt"/>
-              </a:rPr>
-              <a:t>Inconvéniants</a:t>
-            </a:r>
-            <a:endParaRPr lang="fr-FR" dirty="0" err="1"/>
-          </a:p>
-        </p:txBody>
-      </p:sp>
-      <p:sp>
-        <p:nvSpPr>
-          <p:cNvPr id="27" name="Text 21">
-            <a:extLst>
-              <a:ext uri="{FF2B5EF4-FFF2-40B4-BE49-F238E27FC236}">
-                <a16:creationId xmlns:a16="http://schemas.microsoft.com/office/drawing/2014/main" id="{A784E4D9-653E-A4A1-2BAA-4C5742C10DDD}"/>
-              </a:ext>
-            </a:extLst>
-          </p:cNvPr>
-          <p:cNvSpPr/>
-          <p:nvPr/>
-        </p:nvSpPr>
-        <p:spPr>
-          <a:xfrm>
-            <a:off x="9286047" y="1980000"/>
-            <a:ext cx="1962981" cy="1327515"/>
-          </a:xfrm>
-          <a:prstGeom prst="rect">
-            <a:avLst/>
-          </a:prstGeom>
-          <a:noFill/>
-          <a:ln/>
-        </p:spPr>
-        <p:txBody>
-          <a:bodyPr wrap="square" lIns="0" tIns="0" rIns="0" bIns="0" rtlCol="0" anchor="ctr">
-            <a:normAutofit/>
-          </a:bodyPr>
-          <a:lstStyle/>
-          <a:p>
-            <a:pPr marL="285750" indent="-285750">
-              <a:buFont typeface="Calibri"/>
-              <a:buChar char="-"/>
-            </a:pPr>
-            <a:r>
-              <a:rPr lang="en-US" sz="1400" dirty="0">
-                <a:solidFill>
-                  <a:srgbClr val="0F172A"/>
-                </a:solidFill>
-                <a:ea typeface="+mn-lt"/>
-                <a:cs typeface="+mn-lt"/>
-              </a:rPr>
-              <a:t>sur un petit dataset, le </a:t>
-            </a:r>
-            <a:r>
-              <a:rPr lang="en-US" sz="1400" dirty="0" err="1">
-                <a:solidFill>
-                  <a:srgbClr val="0F172A"/>
-                </a:solidFill>
-                <a:ea typeface="+mn-lt"/>
-                <a:cs typeface="+mn-lt"/>
-              </a:rPr>
-              <a:t>deeplearning</a:t>
-            </a:r>
-            <a:r>
-              <a:rPr lang="en-US" sz="1400" dirty="0">
-                <a:solidFill>
-                  <a:srgbClr val="0F172A"/>
-                </a:solidFill>
-                <a:ea typeface="+mn-lt"/>
-                <a:cs typeface="+mn-lt"/>
-              </a:rPr>
-              <a:t> </a:t>
-            </a:r>
-            <a:r>
-              <a:rPr lang="en-US" sz="1400" dirty="0" err="1">
-                <a:solidFill>
-                  <a:srgbClr val="0F172A"/>
-                </a:solidFill>
-                <a:ea typeface="+mn-lt"/>
-                <a:cs typeface="+mn-lt"/>
-              </a:rPr>
-              <a:t>n'est</a:t>
-            </a:r>
-            <a:r>
-              <a:rPr lang="en-US" sz="1400" dirty="0">
-                <a:solidFill>
-                  <a:srgbClr val="0F172A"/>
-                </a:solidFill>
-                <a:ea typeface="+mn-lt"/>
-                <a:cs typeface="+mn-lt"/>
-              </a:rPr>
-              <a:t> pas le </a:t>
-            </a:r>
-            <a:r>
-              <a:rPr lang="en-US" sz="1400" dirty="0" err="1">
-                <a:solidFill>
-                  <a:srgbClr val="0F172A"/>
-                </a:solidFill>
-                <a:ea typeface="+mn-lt"/>
-                <a:cs typeface="+mn-lt"/>
-              </a:rPr>
-              <a:t>meilleur</a:t>
-            </a:r>
-            <a:r>
-              <a:rPr lang="en-US" sz="1400" dirty="0">
-                <a:solidFill>
-                  <a:srgbClr val="0F172A"/>
-                </a:solidFill>
-                <a:ea typeface="+mn-lt"/>
-                <a:cs typeface="+mn-lt"/>
-              </a:rPr>
-              <a:t> choix</a:t>
-            </a:r>
-            <a:endParaRPr lang="en-US" sz="1400" dirty="0">
-              <a:solidFill>
-                <a:srgbClr val="0F172A"/>
-              </a:solidFill>
-            </a:endParaRPr>
-          </a:p>
-        </p:txBody>
-      </p:sp>
-      <p:sp>
-        <p:nvSpPr>
           <p:cNvPr id="9" name="Shape 12">
             <a:extLst>
               <a:ext uri="{FF2B5EF4-FFF2-40B4-BE49-F238E27FC236}">
@@ -3975,10 +3538,10 @@
               <a:buChar char="-"/>
             </a:pPr>
             <a:r>
-              <a:rPr lang="fr-FR" sz="1600"/>
+              <a:rPr lang="fr-FR" sz="1600" dirty="0"/>
               <a:t>500 itérations</a:t>
             </a:r>
-            <a:endParaRPr lang="fr-FR"/>
+            <a:endParaRPr lang="fr-FR" dirty="0"/>
           </a:p>
           <a:p>
             <a:pPr marL="285750" indent="-285750">
@@ -4004,7 +3567,7 @@
               <a:buChar char="-"/>
             </a:pPr>
             <a:r>
-              <a:rPr lang="fr-FR" sz="1600"/>
+              <a:rPr lang="fr-FR" sz="1600" dirty="0"/>
               <a:t>32 neurones dans la 2e</a:t>
             </a:r>
           </a:p>
@@ -4042,7 +3605,7 @@
         </p:nvSpPr>
         <p:spPr>
           <a:xfrm>
-            <a:off x="6550000" y="4334614"/>
+            <a:off x="6265528" y="4242448"/>
             <a:ext cx="5011860" cy="1856600"/>
           </a:xfrm>
           <a:prstGeom prst="roundRect">
@@ -4140,6 +3703,269 @@
           </a:p>
         </p:txBody>
       </p:sp>
+      <p:graphicFrame>
+        <p:nvGraphicFramePr>
+          <p:cNvPr id="12" name="Tableau 11">
+            <a:extLst>
+              <a:ext uri="{FF2B5EF4-FFF2-40B4-BE49-F238E27FC236}">
+                <a16:creationId xmlns:a16="http://schemas.microsoft.com/office/drawing/2014/main" id="{FA9F857B-A846-D57C-786A-149E872E727C}"/>
+              </a:ext>
+            </a:extLst>
+          </p:cNvPr>
+          <p:cNvGraphicFramePr>
+            <a:graphicFrameLocks noGrp="1"/>
+          </p:cNvGraphicFramePr>
+          <p:nvPr>
+            <p:extLst>
+              <p:ext uri="{D42A27DB-BD31-4B8C-83A1-F6EECF244321}">
+                <p14:modId xmlns:p14="http://schemas.microsoft.com/office/powerpoint/2010/main" val="2155043958"/>
+              </p:ext>
+            </p:extLst>
+          </p:nvPr>
+        </p:nvGraphicFramePr>
+        <p:xfrm>
+          <a:off x="5952896" y="1820000"/>
+          <a:ext cx="5705704" cy="1437640"/>
+        </p:xfrm>
+        <a:graphic>
+          <a:graphicData uri="http://schemas.openxmlformats.org/drawingml/2006/table">
+            <a:tbl>
+              <a:tblPr firstRow="1" bandRow="1">
+                <a:tableStyleId>{073A0DAA-6AF3-43AB-8588-CEC1D06C72B9}</a:tableStyleId>
+              </a:tblPr>
+              <a:tblGrid>
+                <a:gridCol w="2852852">
+                  <a:extLst>
+                    <a:ext uri="{9D8B030D-6E8A-4147-A177-3AD203B41FA5}">
+                      <a16:colId xmlns:a16="http://schemas.microsoft.com/office/drawing/2014/main" val="3095843017"/>
+                    </a:ext>
+                  </a:extLst>
+                </a:gridCol>
+                <a:gridCol w="2852852">
+                  <a:extLst>
+                    <a:ext uri="{9D8B030D-6E8A-4147-A177-3AD203B41FA5}">
+                      <a16:colId xmlns:a16="http://schemas.microsoft.com/office/drawing/2014/main" val="1561732748"/>
+                    </a:ext>
+                  </a:extLst>
+                </a:gridCol>
+              </a:tblGrid>
+              <a:tr h="370840">
+                <a:tc>
+                  <a:txBody>
+                    <a:bodyPr/>
+                    <a:lstStyle/>
+                    <a:p>
+                      <a:r>
+                        <a:rPr lang="fr-FR" dirty="0"/>
+                        <a:t>Avantages</a:t>
+                      </a:r>
+                    </a:p>
+                  </a:txBody>
+                  <a:tcPr/>
+                </a:tc>
+                <a:tc>
+                  <a:txBody>
+                    <a:bodyPr/>
+                    <a:lstStyle/>
+                    <a:p>
+                      <a:r>
+                        <a:rPr lang="en-US" sz="1800" dirty="0">
+                          <a:solidFill>
+                            <a:schemeClr val="bg1"/>
+                          </a:solidFill>
+                          <a:ea typeface="+mn-lt"/>
+                          <a:cs typeface="+mn-lt"/>
+                        </a:rPr>
+                        <a:t>Inconvénient</a:t>
+                      </a:r>
+                      <a:endParaRPr lang="fr-FR" dirty="0">
+                        <a:solidFill>
+                          <a:schemeClr val="bg1"/>
+                        </a:solidFill>
+                      </a:endParaRPr>
+                    </a:p>
+                  </a:txBody>
+                  <a:tcPr/>
+                </a:tc>
+                <a:extLst>
+                  <a:ext uri="{0D108BD9-81ED-4DB2-BD59-A6C34878D82A}">
+                    <a16:rowId xmlns:a16="http://schemas.microsoft.com/office/drawing/2014/main" val="3615889654"/>
+                  </a:ext>
+                </a:extLst>
+              </a:tr>
+              <a:tr h="370840">
+                <a:tc>
+                  <a:txBody>
+                    <a:bodyPr/>
+                    <a:lstStyle/>
+                    <a:p>
+                      <a:pPr marL="285750" indent="-285750">
+                        <a:buFont typeface="Calibri"/>
+                        <a:buChar char="-"/>
+                      </a:pPr>
+                      <a:r>
+                        <a:rPr lang="en-US" sz="1600" dirty="0" err="1">
+                          <a:solidFill>
+                            <a:srgbClr val="0F172A"/>
+                          </a:solidFill>
+                          <a:ea typeface="+mn-lt"/>
+                          <a:cs typeface="+mn-lt"/>
+                        </a:rPr>
+                        <a:t>Capte</a:t>
+                      </a:r>
+                      <a:r>
+                        <a:rPr lang="en-US" sz="1600" dirty="0">
+                          <a:solidFill>
+                            <a:srgbClr val="0F172A"/>
+                          </a:solidFill>
+                          <a:ea typeface="+mn-lt"/>
+                          <a:cs typeface="+mn-lt"/>
+                        </a:rPr>
+                        <a:t> des interactions complexes</a:t>
+                      </a:r>
+                    </a:p>
+                    <a:p>
+                      <a:pPr marL="285750" indent="-285750">
+                        <a:buFont typeface="Calibri"/>
+                        <a:buChar char="-"/>
+                      </a:pPr>
+                      <a:r>
+                        <a:rPr lang="en-US" sz="1600" dirty="0">
+                          <a:solidFill>
+                            <a:srgbClr val="0F172A"/>
+                          </a:solidFill>
+                          <a:ea typeface="+mn-lt"/>
+                          <a:cs typeface="+mn-lt"/>
+                        </a:rPr>
+                        <a:t>Flexible</a:t>
+                      </a:r>
+                      <a:endParaRPr lang="en-US" sz="1600" dirty="0">
+                        <a:solidFill>
+                          <a:srgbClr val="0F172A"/>
+                        </a:solidFill>
+                      </a:endParaRPr>
+                    </a:p>
+                  </a:txBody>
+                  <a:tcPr/>
+                </a:tc>
+                <a:tc>
+                  <a:txBody>
+                    <a:bodyPr/>
+                    <a:lstStyle/>
+                    <a:p>
+                      <a:pPr marL="0" marR="0" lvl="0" indent="0" algn="l" defTabSz="914400" rtl="0" eaLnBrk="1" fontAlgn="auto" latinLnBrk="0" hangingPunct="1">
+                        <a:lnSpc>
+                          <a:spcPct val="100000"/>
+                        </a:lnSpc>
+                        <a:spcBef>
+                          <a:spcPts val="0"/>
+                        </a:spcBef>
+                        <a:spcAft>
+                          <a:spcPts val="0"/>
+                        </a:spcAft>
+                        <a:buClrTx/>
+                        <a:buSzTx/>
+                        <a:buFontTx/>
+                        <a:buNone/>
+                        <a:tabLst/>
+                        <a:defRPr/>
+                      </a:pPr>
+                      <a:r>
+                        <a:rPr lang="fr-FR" sz="1600" dirty="0"/>
+                        <a:t>-  </a:t>
+                      </a:r>
+                      <a:r>
+                        <a:rPr lang="en-US" sz="1600" dirty="0">
+                          <a:solidFill>
+                            <a:srgbClr val="0F172A"/>
+                          </a:solidFill>
+                          <a:ea typeface="+mn-lt"/>
+                          <a:cs typeface="+mn-lt"/>
+                        </a:rPr>
+                        <a:t>sur un petit dataset, le </a:t>
+                      </a:r>
+                      <a:r>
+                        <a:rPr lang="en-US" sz="1600" dirty="0" err="1">
+                          <a:solidFill>
+                            <a:srgbClr val="0F172A"/>
+                          </a:solidFill>
+                          <a:ea typeface="+mn-lt"/>
+                          <a:cs typeface="+mn-lt"/>
+                        </a:rPr>
+                        <a:t>deeplearning</a:t>
+                      </a:r>
+                      <a:r>
+                        <a:rPr lang="en-US" sz="1600" dirty="0">
+                          <a:solidFill>
+                            <a:srgbClr val="0F172A"/>
+                          </a:solidFill>
+                          <a:ea typeface="+mn-lt"/>
+                          <a:cs typeface="+mn-lt"/>
+                        </a:rPr>
+                        <a:t> </a:t>
+                      </a:r>
+                      <a:r>
+                        <a:rPr lang="en-US" sz="1600" dirty="0" err="1">
+                          <a:solidFill>
+                            <a:srgbClr val="0F172A"/>
+                          </a:solidFill>
+                          <a:ea typeface="+mn-lt"/>
+                          <a:cs typeface="+mn-lt"/>
+                        </a:rPr>
+                        <a:t>n'est</a:t>
+                      </a:r>
+                      <a:r>
+                        <a:rPr lang="en-US" sz="1600" dirty="0">
+                          <a:solidFill>
+                            <a:srgbClr val="0F172A"/>
+                          </a:solidFill>
+                          <a:ea typeface="+mn-lt"/>
+                          <a:cs typeface="+mn-lt"/>
+                        </a:rPr>
+                        <a:t> pas le </a:t>
+                      </a:r>
+                      <a:r>
+                        <a:rPr lang="en-US" sz="1600" dirty="0" err="1">
+                          <a:solidFill>
+                            <a:srgbClr val="0F172A"/>
+                          </a:solidFill>
+                          <a:ea typeface="+mn-lt"/>
+                          <a:cs typeface="+mn-lt"/>
+                        </a:rPr>
+                        <a:t>meilleur</a:t>
+                      </a:r>
+                      <a:r>
+                        <a:rPr lang="en-US" sz="1600" dirty="0">
+                          <a:solidFill>
+                            <a:srgbClr val="0F172A"/>
+                          </a:solidFill>
+                          <a:ea typeface="+mn-lt"/>
+                          <a:cs typeface="+mn-lt"/>
+                        </a:rPr>
+                        <a:t> choix</a:t>
+                      </a:r>
+                      <a:endParaRPr lang="en-US" sz="1600" dirty="0">
+                        <a:solidFill>
+                          <a:srgbClr val="0F172A"/>
+                        </a:solidFill>
+                      </a:endParaRPr>
+                    </a:p>
+                    <a:p>
+                      <a:endParaRPr lang="fr-FR" sz="1600" dirty="0"/>
+                    </a:p>
+                  </a:txBody>
+                  <a:tcPr/>
+                </a:tc>
+                <a:extLst>
+                  <a:ext uri="{0D108BD9-81ED-4DB2-BD59-A6C34878D82A}">
+                    <a16:rowId xmlns:a16="http://schemas.microsoft.com/office/drawing/2014/main" val="628995668"/>
+                  </a:ext>
+                </a:extLst>
+              </a:tr>
+            </a:tbl>
+          </a:graphicData>
+        </a:graphic>
+      </p:graphicFrame>
     </p:spTree>
     <p:extLst>
       <p:ext uri="{BB962C8B-B14F-4D97-AF65-F5344CB8AC3E}">
@@ -4267,6 +4093,13 @@
             <a:prstDash val="solid"/>
           </a:ln>
         </p:spPr>
+        <p:txBody>
+          <a:bodyPr/>
+          <a:lstStyle/>
+          <a:p>
+            <a:endParaRPr lang="fr-FR"/>
+          </a:p>
+        </p:txBody>
       </p:sp>
       <p:sp>
         <p:nvSpPr>
@@ -4276,7 +4109,7 @@
         </p:nvSpPr>
         <p:spPr>
           <a:xfrm>
-            <a:off x="731520" y="1280160"/>
+            <a:off x="731520" y="1863254"/>
             <a:ext cx="1645920" cy="228600"/>
           </a:xfrm>
           <a:prstGeom prst="rect">
@@ -4312,7 +4145,7 @@
         </p:nvSpPr>
         <p:spPr>
           <a:xfrm>
-            <a:off x="731520" y="1810512"/>
+            <a:off x="731520" y="2393606"/>
             <a:ext cx="1828800" cy="182880"/>
           </a:xfrm>
           <a:prstGeom prst="rect">
@@ -4348,7 +4181,7 @@
         </p:nvSpPr>
         <p:spPr>
           <a:xfrm>
-            <a:off x="2651760" y="1737360"/>
+            <a:off x="2651760" y="2320454"/>
             <a:ext cx="2560320" cy="292608"/>
           </a:xfrm>
           <a:prstGeom prst="rect">
@@ -4364,6 +4197,13 @@
             <a:prstDash val="solid"/>
           </a:ln>
         </p:spPr>
+        <p:txBody>
+          <a:bodyPr/>
+          <a:lstStyle/>
+          <a:p>
+            <a:endParaRPr lang="fr-FR"/>
+          </a:p>
+        </p:txBody>
       </p:sp>
       <p:sp>
         <p:nvSpPr>
@@ -4373,7 +4213,7 @@
         </p:nvSpPr>
         <p:spPr>
           <a:xfrm>
-            <a:off x="2651760" y="1737360"/>
+            <a:off x="2651760" y="2320454"/>
             <a:ext cx="2142134" cy="292608"/>
           </a:xfrm>
           <a:prstGeom prst="rect">
@@ -4389,6 +4229,13 @@
             <a:prstDash val="solid"/>
           </a:ln>
         </p:spPr>
+        <p:txBody>
+          <a:bodyPr/>
+          <a:lstStyle/>
+          <a:p>
+            <a:endParaRPr lang="fr-FR"/>
+          </a:p>
+        </p:txBody>
       </p:sp>
       <p:sp>
         <p:nvSpPr>
@@ -4398,7 +4245,7 @@
         </p:nvSpPr>
         <p:spPr>
           <a:xfrm>
-            <a:off x="5349240" y="1783080"/>
+            <a:off x="5349240" y="2366174"/>
             <a:ext cx="457200" cy="182880"/>
           </a:xfrm>
           <a:prstGeom prst="rect">
@@ -4434,7 +4281,7 @@
         </p:nvSpPr>
         <p:spPr>
           <a:xfrm>
-            <a:off x="731520" y="2468880"/>
+            <a:off x="731520" y="3051974"/>
             <a:ext cx="1828800" cy="182880"/>
           </a:xfrm>
           <a:prstGeom prst="rect">
@@ -4470,7 +4317,7 @@
         </p:nvSpPr>
         <p:spPr>
           <a:xfrm>
-            <a:off x="2651760" y="2395728"/>
+            <a:off x="2651760" y="2978822"/>
             <a:ext cx="2560320" cy="292608"/>
           </a:xfrm>
           <a:prstGeom prst="rect">
@@ -4486,6 +4333,13 @@
             <a:prstDash val="solid"/>
           </a:ln>
         </p:spPr>
+        <p:txBody>
+          <a:bodyPr/>
+          <a:lstStyle/>
+          <a:p>
+            <a:endParaRPr lang="fr-FR"/>
+          </a:p>
+        </p:txBody>
       </p:sp>
       <p:sp>
         <p:nvSpPr>
@@ -4495,7 +4349,7 @@
         </p:nvSpPr>
         <p:spPr>
           <a:xfrm>
-            <a:off x="2651760" y="2395728"/>
+            <a:off x="2651760" y="2978822"/>
             <a:ext cx="2073859" cy="292608"/>
           </a:xfrm>
           <a:prstGeom prst="rect">
@@ -4511,6 +4365,13 @@
             <a:prstDash val="solid"/>
           </a:ln>
         </p:spPr>
+        <p:txBody>
+          <a:bodyPr/>
+          <a:lstStyle/>
+          <a:p>
+            <a:endParaRPr lang="fr-FR"/>
+          </a:p>
+        </p:txBody>
       </p:sp>
       <p:sp>
         <p:nvSpPr>
@@ -4520,7 +4381,7 @@
         </p:nvSpPr>
         <p:spPr>
           <a:xfrm>
-            <a:off x="5349240" y="2441448"/>
+            <a:off x="5349240" y="3024542"/>
             <a:ext cx="457200" cy="182880"/>
           </a:xfrm>
           <a:prstGeom prst="rect">
@@ -4556,7 +4417,7 @@
         </p:nvSpPr>
         <p:spPr>
           <a:xfrm>
-            <a:off x="731520" y="3127248"/>
+            <a:off x="731520" y="3710342"/>
             <a:ext cx="1828800" cy="182880"/>
           </a:xfrm>
           <a:prstGeom prst="rect">
@@ -4592,7 +4453,7 @@
         </p:nvSpPr>
         <p:spPr>
           <a:xfrm>
-            <a:off x="2651760" y="3054096"/>
+            <a:off x="2651760" y="3637190"/>
             <a:ext cx="2560320" cy="292608"/>
           </a:xfrm>
           <a:prstGeom prst="rect">
@@ -4608,6 +4469,13 @@
             <a:prstDash val="solid"/>
           </a:ln>
         </p:spPr>
+        <p:txBody>
+          <a:bodyPr/>
+          <a:lstStyle/>
+          <a:p>
+            <a:endParaRPr lang="fr-FR"/>
+          </a:p>
+        </p:txBody>
       </p:sp>
       <p:sp>
         <p:nvSpPr>
@@ -4617,7 +4485,7 @@
         </p:nvSpPr>
         <p:spPr>
           <a:xfrm>
-            <a:off x="2651760" y="3054096"/>
+            <a:off x="2651760" y="3637190"/>
             <a:ext cx="1638605" cy="292608"/>
           </a:xfrm>
           <a:prstGeom prst="rect">
@@ -4633,6 +4501,13 @@
             <a:prstDash val="solid"/>
           </a:ln>
         </p:spPr>
+        <p:txBody>
+          <a:bodyPr/>
+          <a:lstStyle/>
+          <a:p>
+            <a:endParaRPr lang="fr-FR"/>
+          </a:p>
+        </p:txBody>
       </p:sp>
       <p:sp>
         <p:nvSpPr>
@@ -4642,7 +4517,7 @@
         </p:nvSpPr>
         <p:spPr>
           <a:xfrm>
-            <a:off x="5349240" y="3099816"/>
+            <a:off x="5349240" y="3682910"/>
             <a:ext cx="457200" cy="182880"/>
           </a:xfrm>
           <a:prstGeom prst="rect">
@@ -4678,7 +4553,7 @@
         </p:nvSpPr>
         <p:spPr>
           <a:xfrm>
-            <a:off x="731520" y="3785616"/>
+            <a:off x="731520" y="4368710"/>
             <a:ext cx="1828800" cy="182880"/>
           </a:xfrm>
           <a:prstGeom prst="rect">
@@ -4714,7 +4589,7 @@
         </p:nvSpPr>
         <p:spPr>
           <a:xfrm>
-            <a:off x="2651760" y="3712464"/>
+            <a:off x="2651760" y="4295558"/>
             <a:ext cx="2560320" cy="292608"/>
           </a:xfrm>
           <a:prstGeom prst="rect">
@@ -4730,6 +4605,13 @@
             <a:prstDash val="solid"/>
           </a:ln>
         </p:spPr>
+        <p:txBody>
+          <a:bodyPr/>
+          <a:lstStyle/>
+          <a:p>
+            <a:endParaRPr lang="fr-FR"/>
+          </a:p>
+        </p:txBody>
       </p:sp>
       <p:sp>
         <p:nvSpPr>
@@ -4739,7 +4621,7 @@
         </p:nvSpPr>
         <p:spPr>
           <a:xfrm>
-            <a:off x="2651760" y="3712464"/>
+            <a:off x="2651760" y="4295558"/>
             <a:ext cx="665683" cy="292608"/>
           </a:xfrm>
           <a:prstGeom prst="rect">
@@ -4755,6 +4637,13 @@
             <a:prstDash val="solid"/>
           </a:ln>
         </p:spPr>
+        <p:txBody>
+          <a:bodyPr/>
+          <a:lstStyle/>
+          <a:p>
+            <a:endParaRPr lang="fr-FR"/>
+          </a:p>
+        </p:txBody>
       </p:sp>
       <p:sp>
         <p:nvSpPr>
@@ -4764,7 +4653,7 @@
         </p:nvSpPr>
         <p:spPr>
           <a:xfrm>
-            <a:off x="5349240" y="3758184"/>
+            <a:off x="5349240" y="4341278"/>
             <a:ext cx="457200" cy="182880"/>
           </a:xfrm>
           <a:prstGeom prst="rect">
@@ -4800,7 +4689,7 @@
         </p:nvSpPr>
         <p:spPr>
           <a:xfrm>
-            <a:off x="6263640" y="1463040"/>
+            <a:off x="6263640" y="2046134"/>
             <a:ext cx="1463040" cy="384048"/>
           </a:xfrm>
           <a:prstGeom prst="rect">
@@ -4816,6 +4705,13 @@
             <a:prstDash val="solid"/>
           </a:ln>
         </p:spPr>
+        <p:txBody>
+          <a:bodyPr/>
+          <a:lstStyle/>
+          <a:p>
+            <a:endParaRPr lang="fr-FR"/>
+          </a:p>
+        </p:txBody>
       </p:sp>
       <p:sp>
         <p:nvSpPr>
@@ -4825,7 +4721,7 @@
         </p:nvSpPr>
         <p:spPr>
           <a:xfrm>
-            <a:off x="6300216" y="1572768"/>
+            <a:off x="6300216" y="2155862"/>
             <a:ext cx="1389888" cy="109728"/>
           </a:xfrm>
           <a:prstGeom prst="rect">
@@ -4861,7 +4757,7 @@
         </p:nvSpPr>
         <p:spPr>
           <a:xfrm>
-            <a:off x="7726680" y="1463040"/>
+            <a:off x="7726680" y="2046134"/>
             <a:ext cx="914400" cy="384048"/>
           </a:xfrm>
           <a:prstGeom prst="rect">
@@ -4877,6 +4773,13 @@
             <a:prstDash val="solid"/>
           </a:ln>
         </p:spPr>
+        <p:txBody>
+          <a:bodyPr/>
+          <a:lstStyle/>
+          <a:p>
+            <a:endParaRPr lang="fr-FR"/>
+          </a:p>
+        </p:txBody>
       </p:sp>
       <p:sp>
         <p:nvSpPr>
@@ -4886,7 +4789,7 @@
         </p:nvSpPr>
         <p:spPr>
           <a:xfrm>
-            <a:off x="7763256" y="1572768"/>
+            <a:off x="7763256" y="2155862"/>
             <a:ext cx="841248" cy="109728"/>
           </a:xfrm>
           <a:prstGeom prst="rect">
@@ -4922,7 +4825,7 @@
         </p:nvSpPr>
         <p:spPr>
           <a:xfrm>
-            <a:off x="8641080" y="1463040"/>
+            <a:off x="8641080" y="2046134"/>
             <a:ext cx="914400" cy="384048"/>
           </a:xfrm>
           <a:prstGeom prst="rect">
@@ -4938,6 +4841,13 @@
             <a:prstDash val="solid"/>
           </a:ln>
         </p:spPr>
+        <p:txBody>
+          <a:bodyPr/>
+          <a:lstStyle/>
+          <a:p>
+            <a:endParaRPr lang="fr-FR"/>
+          </a:p>
+        </p:txBody>
       </p:sp>
       <p:sp>
         <p:nvSpPr>
@@ -4947,7 +4857,7 @@
         </p:nvSpPr>
         <p:spPr>
           <a:xfrm>
-            <a:off x="8677656" y="1572768"/>
+            <a:off x="8677656" y="2155862"/>
             <a:ext cx="841248" cy="109728"/>
           </a:xfrm>
           <a:prstGeom prst="rect">
@@ -4983,7 +4893,7 @@
         </p:nvSpPr>
         <p:spPr>
           <a:xfrm>
-            <a:off x="9555480" y="1463040"/>
+            <a:off x="9555480" y="2046134"/>
             <a:ext cx="731520" cy="384048"/>
           </a:xfrm>
           <a:prstGeom prst="rect">
@@ -4999,6 +4909,13 @@
             <a:prstDash val="solid"/>
           </a:ln>
         </p:spPr>
+        <p:txBody>
+          <a:bodyPr/>
+          <a:lstStyle/>
+          <a:p>
+            <a:endParaRPr lang="fr-FR"/>
+          </a:p>
+        </p:txBody>
       </p:sp>
       <p:sp>
         <p:nvSpPr>
@@ -5008,7 +4925,7 @@
         </p:nvSpPr>
         <p:spPr>
           <a:xfrm>
-            <a:off x="9592056" y="1572768"/>
+            <a:off x="9592056" y="2155862"/>
             <a:ext cx="658368" cy="109728"/>
           </a:xfrm>
           <a:prstGeom prst="rect">
@@ -5044,7 +4961,7 @@
         </p:nvSpPr>
         <p:spPr>
           <a:xfrm>
-            <a:off x="10287000" y="1463040"/>
+            <a:off x="10287000" y="2046134"/>
             <a:ext cx="731520" cy="384048"/>
           </a:xfrm>
           <a:prstGeom prst="rect">
@@ -5060,6 +4977,13 @@
             <a:prstDash val="solid"/>
           </a:ln>
         </p:spPr>
+        <p:txBody>
+          <a:bodyPr/>
+          <a:lstStyle/>
+          <a:p>
+            <a:endParaRPr lang="fr-FR"/>
+          </a:p>
+        </p:txBody>
       </p:sp>
       <p:sp>
         <p:nvSpPr>
@@ -5069,7 +4993,7 @@
         </p:nvSpPr>
         <p:spPr>
           <a:xfrm>
-            <a:off x="10323576" y="1572768"/>
+            <a:off x="10323576" y="2155862"/>
             <a:ext cx="658368" cy="109728"/>
           </a:xfrm>
           <a:prstGeom prst="rect">
@@ -5105,7 +5029,7 @@
         </p:nvSpPr>
         <p:spPr>
           <a:xfrm>
-            <a:off x="6263640" y="1856232"/>
+            <a:off x="6263640" y="2439326"/>
             <a:ext cx="1463040" cy="384048"/>
           </a:xfrm>
           <a:prstGeom prst="rect">
@@ -5121,6 +5045,13 @@
             <a:prstDash val="solid"/>
           </a:ln>
         </p:spPr>
+        <p:txBody>
+          <a:bodyPr/>
+          <a:lstStyle/>
+          <a:p>
+            <a:endParaRPr lang="fr-FR"/>
+          </a:p>
+        </p:txBody>
       </p:sp>
       <p:sp>
         <p:nvSpPr>
@@ -5130,7 +5061,7 @@
         </p:nvSpPr>
         <p:spPr>
           <a:xfrm>
-            <a:off x="6300216" y="1965960"/>
+            <a:off x="6300216" y="2549054"/>
             <a:ext cx="1389888" cy="109728"/>
           </a:xfrm>
           <a:prstGeom prst="rect">
@@ -5166,7 +5097,7 @@
         </p:nvSpPr>
         <p:spPr>
           <a:xfrm>
-            <a:off x="7726680" y="1856232"/>
+            <a:off x="7726680" y="2439326"/>
             <a:ext cx="914400" cy="384048"/>
           </a:xfrm>
           <a:prstGeom prst="rect">
@@ -5182,6 +5113,13 @@
             <a:prstDash val="solid"/>
           </a:ln>
         </p:spPr>
+        <p:txBody>
+          <a:bodyPr/>
+          <a:lstStyle/>
+          <a:p>
+            <a:endParaRPr lang="fr-FR"/>
+          </a:p>
+        </p:txBody>
       </p:sp>
       <p:sp>
         <p:nvSpPr>
@@ -5191,7 +5129,7 @@
         </p:nvSpPr>
         <p:spPr>
           <a:xfrm>
-            <a:off x="7763256" y="1965960"/>
+            <a:off x="7763256" y="2549054"/>
             <a:ext cx="841248" cy="109728"/>
           </a:xfrm>
           <a:prstGeom prst="rect">
@@ -5227,7 +5165,7 @@
         </p:nvSpPr>
         <p:spPr>
           <a:xfrm>
-            <a:off x="8641080" y="1856232"/>
+            <a:off x="8641080" y="2439326"/>
             <a:ext cx="914400" cy="384048"/>
           </a:xfrm>
           <a:prstGeom prst="rect">
@@ -5243,6 +5181,13 @@
             <a:prstDash val="solid"/>
           </a:ln>
         </p:spPr>
+        <p:txBody>
+          <a:bodyPr/>
+          <a:lstStyle/>
+          <a:p>
+            <a:endParaRPr lang="fr-FR"/>
+          </a:p>
+        </p:txBody>
       </p:sp>
       <p:sp>
         <p:nvSpPr>
@@ -5252,7 +5197,7 @@
         </p:nvSpPr>
         <p:spPr>
           <a:xfrm>
-            <a:off x="8677656" y="1965960"/>
+            <a:off x="8677656" y="2549054"/>
             <a:ext cx="841248" cy="109728"/>
           </a:xfrm>
           <a:prstGeom prst="rect">
@@ -5288,7 +5233,7 @@
         </p:nvSpPr>
         <p:spPr>
           <a:xfrm>
-            <a:off x="9555480" y="1856232"/>
+            <a:off x="9555480" y="2439326"/>
             <a:ext cx="731520" cy="384048"/>
           </a:xfrm>
           <a:prstGeom prst="rect">
@@ -5304,6 +5249,13 @@
             <a:prstDash val="solid"/>
           </a:ln>
         </p:spPr>
+        <p:txBody>
+          <a:bodyPr/>
+          <a:lstStyle/>
+          <a:p>
+            <a:endParaRPr lang="fr-FR"/>
+          </a:p>
+        </p:txBody>
       </p:sp>
       <p:sp>
         <p:nvSpPr>
@@ -5313,7 +5265,7 @@
         </p:nvSpPr>
         <p:spPr>
           <a:xfrm>
-            <a:off x="9592056" y="1965960"/>
+            <a:off x="9592056" y="2549054"/>
             <a:ext cx="658368" cy="109728"/>
           </a:xfrm>
           <a:prstGeom prst="rect">
@@ -5349,7 +5301,7 @@
         </p:nvSpPr>
         <p:spPr>
           <a:xfrm>
-            <a:off x="10287000" y="1856232"/>
+            <a:off x="10287000" y="2439326"/>
             <a:ext cx="731520" cy="384048"/>
           </a:xfrm>
           <a:prstGeom prst="rect">
@@ -5365,6 +5317,13 @@
             <a:prstDash val="solid"/>
           </a:ln>
         </p:spPr>
+        <p:txBody>
+          <a:bodyPr/>
+          <a:lstStyle/>
+          <a:p>
+            <a:endParaRPr lang="fr-FR"/>
+          </a:p>
+        </p:txBody>
       </p:sp>
       <p:sp>
         <p:nvSpPr>
@@ -5374,7 +5333,7 @@
         </p:nvSpPr>
         <p:spPr>
           <a:xfrm>
-            <a:off x="10323576" y="1965960"/>
+            <a:off x="10323576" y="2549054"/>
             <a:ext cx="658368" cy="109728"/>
           </a:xfrm>
           <a:prstGeom prst="rect">
@@ -5410,7 +5369,7 @@
         </p:nvSpPr>
         <p:spPr>
           <a:xfrm>
-            <a:off x="6263640" y="2249424"/>
+            <a:off x="6263640" y="2832518"/>
             <a:ext cx="1463040" cy="384048"/>
           </a:xfrm>
           <a:prstGeom prst="rect">
@@ -5426,6 +5385,13 @@
             <a:prstDash val="solid"/>
           </a:ln>
         </p:spPr>
+        <p:txBody>
+          <a:bodyPr/>
+          <a:lstStyle/>
+          <a:p>
+            <a:endParaRPr lang="fr-FR"/>
+          </a:p>
+        </p:txBody>
       </p:sp>
       <p:sp>
         <p:nvSpPr>
@@ -5435,7 +5401,7 @@
         </p:nvSpPr>
         <p:spPr>
           <a:xfrm>
-            <a:off x="6300216" y="2359152"/>
+            <a:off x="6300216" y="2942246"/>
             <a:ext cx="1389888" cy="109728"/>
           </a:xfrm>
           <a:prstGeom prst="rect">
@@ -5471,7 +5437,7 @@
         </p:nvSpPr>
         <p:spPr>
           <a:xfrm>
-            <a:off x="7726680" y="2249424"/>
+            <a:off x="7726680" y="2832518"/>
             <a:ext cx="914400" cy="384048"/>
           </a:xfrm>
           <a:prstGeom prst="rect">
@@ -5487,6 +5453,13 @@
             <a:prstDash val="solid"/>
           </a:ln>
         </p:spPr>
+        <p:txBody>
+          <a:bodyPr/>
+          <a:lstStyle/>
+          <a:p>
+            <a:endParaRPr lang="fr-FR"/>
+          </a:p>
+        </p:txBody>
       </p:sp>
       <p:sp>
         <p:nvSpPr>
@@ -5496,7 +5469,7 @@
         </p:nvSpPr>
         <p:spPr>
           <a:xfrm>
-            <a:off x="7763256" y="2359152"/>
+            <a:off x="7763256" y="2942246"/>
             <a:ext cx="841248" cy="109728"/>
           </a:xfrm>
           <a:prstGeom prst="rect">
@@ -5532,7 +5505,7 @@
         </p:nvSpPr>
         <p:spPr>
           <a:xfrm>
-            <a:off x="8641080" y="2249424"/>
+            <a:off x="8641080" y="2832518"/>
             <a:ext cx="914400" cy="384048"/>
           </a:xfrm>
           <a:prstGeom prst="rect">
@@ -5548,6 +5521,13 @@
             <a:prstDash val="solid"/>
           </a:ln>
         </p:spPr>
+        <p:txBody>
+          <a:bodyPr/>
+          <a:lstStyle/>
+          <a:p>
+            <a:endParaRPr lang="fr-FR"/>
+          </a:p>
+        </p:txBody>
       </p:sp>
       <p:sp>
         <p:nvSpPr>
@@ -5557,7 +5537,7 @@
         </p:nvSpPr>
         <p:spPr>
           <a:xfrm>
-            <a:off x="8677656" y="2359152"/>
+            <a:off x="8677656" y="2942246"/>
             <a:ext cx="841248" cy="109728"/>
           </a:xfrm>
           <a:prstGeom prst="rect">
@@ -5593,7 +5573,7 @@
         </p:nvSpPr>
         <p:spPr>
           <a:xfrm>
-            <a:off x="9555480" y="2249424"/>
+            <a:off x="9555480" y="2832518"/>
             <a:ext cx="731520" cy="384048"/>
           </a:xfrm>
           <a:prstGeom prst="rect">
@@ -5609,6 +5589,13 @@
             <a:prstDash val="solid"/>
           </a:ln>
         </p:spPr>
+        <p:txBody>
+          <a:bodyPr/>
+          <a:lstStyle/>
+          <a:p>
+            <a:endParaRPr lang="fr-FR"/>
+          </a:p>
+        </p:txBody>
       </p:sp>
       <p:sp>
         <p:nvSpPr>
@@ -5618,7 +5605,7 @@
         </p:nvSpPr>
         <p:spPr>
           <a:xfrm>
-            <a:off x="9592056" y="2359152"/>
+            <a:off x="9592056" y="2942246"/>
             <a:ext cx="658368" cy="109728"/>
           </a:xfrm>
           <a:prstGeom prst="rect">
@@ -5654,7 +5641,7 @@
         </p:nvSpPr>
         <p:spPr>
           <a:xfrm>
-            <a:off x="10287000" y="2249424"/>
+            <a:off x="10287000" y="2832518"/>
             <a:ext cx="731520" cy="384048"/>
           </a:xfrm>
           <a:prstGeom prst="rect">
@@ -5670,6 +5657,13 @@
             <a:prstDash val="solid"/>
           </a:ln>
         </p:spPr>
+        <p:txBody>
+          <a:bodyPr/>
+          <a:lstStyle/>
+          <a:p>
+            <a:endParaRPr lang="fr-FR"/>
+          </a:p>
+        </p:txBody>
       </p:sp>
       <p:sp>
         <p:nvSpPr>
@@ -5679,7 +5673,7 @@
         </p:nvSpPr>
         <p:spPr>
           <a:xfrm>
-            <a:off x="10323576" y="2359152"/>
+            <a:off x="10323576" y="2942246"/>
             <a:ext cx="658368" cy="109728"/>
           </a:xfrm>
           <a:prstGeom prst="rect">
@@ -5715,7 +5709,7 @@
         </p:nvSpPr>
         <p:spPr>
           <a:xfrm>
-            <a:off x="6263640" y="2642616"/>
+            <a:off x="6263640" y="3225710"/>
             <a:ext cx="1463040" cy="384048"/>
           </a:xfrm>
           <a:prstGeom prst="rect">
@@ -5731,6 +5725,13 @@
             <a:prstDash val="solid"/>
           </a:ln>
         </p:spPr>
+        <p:txBody>
+          <a:bodyPr/>
+          <a:lstStyle/>
+          <a:p>
+            <a:endParaRPr lang="fr-FR"/>
+          </a:p>
+        </p:txBody>
       </p:sp>
       <p:sp>
         <p:nvSpPr>
@@ -5740,7 +5741,7 @@
         </p:nvSpPr>
         <p:spPr>
           <a:xfrm>
-            <a:off x="6300216" y="2752344"/>
+            <a:off x="6300216" y="3335438"/>
             <a:ext cx="1389888" cy="109728"/>
           </a:xfrm>
           <a:prstGeom prst="rect">
@@ -5776,7 +5777,7 @@
         </p:nvSpPr>
         <p:spPr>
           <a:xfrm>
-            <a:off x="7726680" y="2642616"/>
+            <a:off x="7726680" y="3225710"/>
             <a:ext cx="914400" cy="384048"/>
           </a:xfrm>
           <a:prstGeom prst="rect">
@@ -5792,6 +5793,13 @@
             <a:prstDash val="solid"/>
           </a:ln>
         </p:spPr>
+        <p:txBody>
+          <a:bodyPr/>
+          <a:lstStyle/>
+          <a:p>
+            <a:endParaRPr lang="fr-FR"/>
+          </a:p>
+        </p:txBody>
       </p:sp>
       <p:sp>
         <p:nvSpPr>
@@ -5801,7 +5809,7 @@
         </p:nvSpPr>
         <p:spPr>
           <a:xfrm>
-            <a:off x="7763256" y="2752344"/>
+            <a:off x="7763256" y="3335438"/>
             <a:ext cx="841248" cy="109728"/>
           </a:xfrm>
           <a:prstGeom prst="rect">
@@ -5837,7 +5845,7 @@
         </p:nvSpPr>
         <p:spPr>
           <a:xfrm>
-            <a:off x="8641080" y="2642616"/>
+            <a:off x="8641080" y="3225710"/>
             <a:ext cx="914400" cy="384048"/>
           </a:xfrm>
           <a:prstGeom prst="rect">
@@ -5853,6 +5861,13 @@
             <a:prstDash val="solid"/>
           </a:ln>
         </p:spPr>
+        <p:txBody>
+          <a:bodyPr/>
+          <a:lstStyle/>
+          <a:p>
+            <a:endParaRPr lang="fr-FR"/>
+          </a:p>
+        </p:txBody>
       </p:sp>
       <p:sp>
         <p:nvSpPr>
@@ -5862,7 +5877,7 @@
         </p:nvSpPr>
         <p:spPr>
           <a:xfrm>
-            <a:off x="8677656" y="2752344"/>
+            <a:off x="8677656" y="3335438"/>
             <a:ext cx="841248" cy="109728"/>
           </a:xfrm>
           <a:prstGeom prst="rect">
@@ -5898,7 +5913,7 @@
         </p:nvSpPr>
         <p:spPr>
           <a:xfrm>
-            <a:off x="9555480" y="2642616"/>
+            <a:off x="9555480" y="3225710"/>
             <a:ext cx="731520" cy="384048"/>
           </a:xfrm>
           <a:prstGeom prst="rect">
@@ -5914,6 +5929,13 @@
             <a:prstDash val="solid"/>
           </a:ln>
         </p:spPr>
+        <p:txBody>
+          <a:bodyPr/>
+          <a:lstStyle/>
+          <a:p>
+            <a:endParaRPr lang="fr-FR"/>
+          </a:p>
+        </p:txBody>
       </p:sp>
       <p:sp>
         <p:nvSpPr>
@@ -5923,7 +5945,7 @@
         </p:nvSpPr>
         <p:spPr>
           <a:xfrm>
-            <a:off x="9592056" y="2752344"/>
+            <a:off x="9592056" y="3335438"/>
             <a:ext cx="658368" cy="109728"/>
           </a:xfrm>
           <a:prstGeom prst="rect">
@@ -5959,7 +5981,7 @@
         </p:nvSpPr>
         <p:spPr>
           <a:xfrm>
-            <a:off x="10287000" y="2642616"/>
+            <a:off x="10287000" y="3225710"/>
             <a:ext cx="731520" cy="384048"/>
           </a:xfrm>
           <a:prstGeom prst="rect">
@@ -5975,6 +5997,13 @@
             <a:prstDash val="solid"/>
           </a:ln>
         </p:spPr>
+        <p:txBody>
+          <a:bodyPr/>
+          <a:lstStyle/>
+          <a:p>
+            <a:endParaRPr lang="fr-FR"/>
+          </a:p>
+        </p:txBody>
       </p:sp>
       <p:sp>
         <p:nvSpPr>
@@ -5984,7 +6013,7 @@
         </p:nvSpPr>
         <p:spPr>
           <a:xfrm>
-            <a:off x="10323576" y="2752344"/>
+            <a:off x="10323576" y="3335438"/>
             <a:ext cx="658368" cy="109728"/>
           </a:xfrm>
           <a:prstGeom prst="rect">
@@ -6020,7 +6049,7 @@
         </p:nvSpPr>
         <p:spPr>
           <a:xfrm>
-            <a:off x="6263640" y="3035808"/>
+            <a:off x="6263640" y="3618902"/>
             <a:ext cx="1463040" cy="384048"/>
           </a:xfrm>
           <a:prstGeom prst="rect">
@@ -6036,6 +6065,13 @@
             <a:prstDash val="solid"/>
           </a:ln>
         </p:spPr>
+        <p:txBody>
+          <a:bodyPr/>
+          <a:lstStyle/>
+          <a:p>
+            <a:endParaRPr lang="fr-FR"/>
+          </a:p>
+        </p:txBody>
       </p:sp>
       <p:sp>
         <p:nvSpPr>
@@ -6045,7 +6081,7 @@
         </p:nvSpPr>
         <p:spPr>
           <a:xfrm>
-            <a:off x="6300216" y="3145536"/>
+            <a:off x="6300216" y="3728630"/>
             <a:ext cx="1389888" cy="109728"/>
           </a:xfrm>
           <a:prstGeom prst="rect">
@@ -6081,7 +6117,7 @@
         </p:nvSpPr>
         <p:spPr>
           <a:xfrm>
-            <a:off x="7726680" y="3035808"/>
+            <a:off x="7726680" y="3618902"/>
             <a:ext cx="914400" cy="384048"/>
           </a:xfrm>
           <a:prstGeom prst="rect">
@@ -6097,6 +6133,13 @@
             <a:prstDash val="solid"/>
           </a:ln>
         </p:spPr>
+        <p:txBody>
+          <a:bodyPr/>
+          <a:lstStyle/>
+          <a:p>
+            <a:endParaRPr lang="fr-FR"/>
+          </a:p>
+        </p:txBody>
       </p:sp>
       <p:sp>
         <p:nvSpPr>
@@ -6106,7 +6149,7 @@
         </p:nvSpPr>
         <p:spPr>
           <a:xfrm>
-            <a:off x="7763256" y="3145536"/>
+            <a:off x="7763256" y="3728630"/>
             <a:ext cx="841248" cy="109728"/>
           </a:xfrm>
           <a:prstGeom prst="rect">
@@ -6142,7 +6185,7 @@
         </p:nvSpPr>
         <p:spPr>
           <a:xfrm>
-            <a:off x="8641080" y="3035808"/>
+            <a:off x="8641080" y="3618902"/>
             <a:ext cx="914400" cy="384048"/>
           </a:xfrm>
           <a:prstGeom prst="rect">
@@ -6158,6 +6201,13 @@
             <a:prstDash val="solid"/>
           </a:ln>
         </p:spPr>
+        <p:txBody>
+          <a:bodyPr/>
+          <a:lstStyle/>
+          <a:p>
+            <a:endParaRPr lang="fr-FR"/>
+          </a:p>
+        </p:txBody>
       </p:sp>
       <p:sp>
         <p:nvSpPr>
@@ -6167,7 +6217,7 @@
         </p:nvSpPr>
         <p:spPr>
           <a:xfrm>
-            <a:off x="8677656" y="3145536"/>
+            <a:off x="8677656" y="3728630"/>
             <a:ext cx="841248" cy="109728"/>
           </a:xfrm>
           <a:prstGeom prst="rect">
@@ -6203,7 +6253,7 @@
         </p:nvSpPr>
         <p:spPr>
           <a:xfrm>
-            <a:off x="9555480" y="3035808"/>
+            <a:off x="9555480" y="3618902"/>
             <a:ext cx="731520" cy="384048"/>
           </a:xfrm>
           <a:prstGeom prst="rect">
@@ -6219,6 +6269,13 @@
             <a:prstDash val="solid"/>
           </a:ln>
         </p:spPr>
+        <p:txBody>
+          <a:bodyPr/>
+          <a:lstStyle/>
+          <a:p>
+            <a:endParaRPr lang="fr-FR"/>
+          </a:p>
+        </p:txBody>
       </p:sp>
       <p:sp>
         <p:nvSpPr>
@@ -6228,7 +6285,7 @@
         </p:nvSpPr>
         <p:spPr>
           <a:xfrm>
-            <a:off x="9592056" y="3145536"/>
+            <a:off x="9592056" y="3728630"/>
             <a:ext cx="658368" cy="109728"/>
           </a:xfrm>
           <a:prstGeom prst="rect">
@@ -6264,7 +6321,7 @@
         </p:nvSpPr>
         <p:spPr>
           <a:xfrm>
-            <a:off x="10287000" y="3035808"/>
+            <a:off x="10287000" y="3618902"/>
             <a:ext cx="731520" cy="384048"/>
           </a:xfrm>
           <a:prstGeom prst="rect">
@@ -6280,6 +6337,13 @@
             <a:prstDash val="solid"/>
           </a:ln>
         </p:spPr>
+        <p:txBody>
+          <a:bodyPr/>
+          <a:lstStyle/>
+          <a:p>
+            <a:endParaRPr lang="fr-FR"/>
+          </a:p>
+        </p:txBody>
       </p:sp>
       <p:sp>
         <p:nvSpPr>
@@ -6289,7 +6353,7 @@
         </p:nvSpPr>
         <p:spPr>
           <a:xfrm>
-            <a:off x="10323576" y="3145536"/>
+            <a:off x="10323576" y="3728630"/>
             <a:ext cx="658368" cy="109728"/>
           </a:xfrm>
           <a:prstGeom prst="rect">
@@ -6325,7 +6389,7 @@
         </p:nvSpPr>
         <p:spPr>
           <a:xfrm>
-            <a:off x="6400800" y="4160520"/>
+            <a:off x="6400800" y="4743614"/>
             <a:ext cx="4617720" cy="1005840"/>
           </a:xfrm>
           <a:prstGeom prst="roundRect">
@@ -6343,6 +6407,13 @@
             <a:prstDash val="solid"/>
           </a:ln>
         </p:spPr>
+        <p:txBody>
+          <a:bodyPr/>
+          <a:lstStyle/>
+          <a:p>
+            <a:endParaRPr lang="fr-FR"/>
+          </a:p>
+        </p:txBody>
       </p:sp>
       <p:sp>
         <p:nvSpPr>
@@ -6352,7 +6423,7 @@
         </p:nvSpPr>
         <p:spPr>
           <a:xfrm>
-            <a:off x="6629400" y="4343400"/>
+            <a:off x="6629400" y="5059014"/>
             <a:ext cx="1234440" cy="228600"/>
           </a:xfrm>
           <a:prstGeom prst="rect">
@@ -6388,7 +6459,7 @@
         </p:nvSpPr>
         <p:spPr>
           <a:xfrm>
-            <a:off x="7955280" y="4343400"/>
+            <a:off x="7955280" y="5019258"/>
             <a:ext cx="2834640" cy="384048"/>
           </a:xfrm>
           <a:prstGeom prst="rect">
@@ -6399,7 +6470,7 @@
         </p:spPr>
         <p:txBody>
           <a:bodyPr wrap="square" lIns="0" tIns="0" rIns="0" bIns="0" rtlCol="0" anchor="ctr">
-            <a:normAutofit/>
+            <a:normAutofit fontScale="85000" lnSpcReduction="20000"/>
           </a:bodyPr>
           <a:lstStyle/>
           <a:p>
@@ -6415,42 +6486,6 @@
               <a:t>Random Forest retenu : meilleure PR-AUC moyenne en CV, bonne robustesse, interprétation possible et intégration simple.</a:t>
             </a:r>
             <a:endParaRPr lang="en-US" sz="1150" dirty="0"/>
-          </a:p>
-        </p:txBody>
-      </p:sp>
-      <p:sp>
-        <p:nvSpPr>
-          <p:cNvPr id="75" name="Text 73"/>
-          <p:cNvSpPr/>
-          <p:nvPr/>
-        </p:nvSpPr>
-        <p:spPr>
-          <a:xfrm>
-            <a:off x="11201400" y="6446520"/>
-            <a:ext cx="640080" cy="182880"/>
-          </a:xfrm>
-          <a:prstGeom prst="rect">
-            <a:avLst/>
-          </a:prstGeom>
-          <a:noFill/>
-          <a:ln/>
-        </p:spPr>
-        <p:txBody>
-          <a:bodyPr wrap="square" lIns="0" tIns="0" rIns="0" bIns="0" rtlCol="0" anchor="ctr"/>
-          <a:lstStyle/>
-          <a:p>
-            <a:pPr marL="0" indent="0" algn="r">
-              <a:buNone/>
-            </a:pPr>
-            <a:r>
-              <a:rPr lang="en-US" sz="800" dirty="0">
-                <a:solidFill>
-                  <a:srgbClr val="64748B"/>
-                </a:solidFill>
-              </a:rPr>
-              <a:t>6/10</a:t>
-            </a:r>
-            <a:endParaRPr lang="en-US" sz="800" dirty="0"/>
           </a:p>
         </p:txBody>
       </p:sp>
@@ -6576,6 +6611,13 @@
             <a:prstDash val="solid"/>
           </a:ln>
         </p:spPr>
+        <p:txBody>
+          <a:bodyPr/>
+          <a:lstStyle/>
+          <a:p>
+            <a:endParaRPr lang="fr-FR"/>
+          </a:p>
+        </p:txBody>
       </p:sp>
       <p:sp>
         <p:nvSpPr>
@@ -6639,6 +6681,13 @@
             <a:prstDash val="solid"/>
           </a:ln>
         </p:spPr>
+        <p:txBody>
+          <a:bodyPr/>
+          <a:lstStyle/>
+          <a:p>
+            <a:endParaRPr lang="fr-FR"/>
+          </a:p>
+        </p:txBody>
       </p:sp>
       <p:sp>
         <p:nvSpPr>
@@ -6738,6 +6787,13 @@
             <a:prstDash val="solid"/>
           </a:ln>
         </p:spPr>
+        <p:txBody>
+          <a:bodyPr/>
+          <a:lstStyle/>
+          <a:p>
+            <a:endParaRPr lang="fr-FR"/>
+          </a:p>
+        </p:txBody>
       </p:sp>
       <p:sp>
         <p:nvSpPr>
@@ -6837,6 +6893,13 @@
             <a:prstDash val="solid"/>
           </a:ln>
         </p:spPr>
+        <p:txBody>
+          <a:bodyPr/>
+          <a:lstStyle/>
+          <a:p>
+            <a:endParaRPr lang="fr-FR"/>
+          </a:p>
+        </p:txBody>
       </p:sp>
       <p:sp>
         <p:nvSpPr>
@@ -6936,6 +6999,13 @@
             <a:prstDash val="solid"/>
           </a:ln>
         </p:spPr>
+        <p:txBody>
+          <a:bodyPr/>
+          <a:lstStyle/>
+          <a:p>
+            <a:endParaRPr lang="fr-FR"/>
+          </a:p>
+        </p:txBody>
       </p:sp>
       <p:sp>
         <p:nvSpPr>
@@ -7035,6 +7105,13 @@
             <a:prstDash val="solid"/>
           </a:ln>
         </p:spPr>
+        <p:txBody>
+          <a:bodyPr/>
+          <a:lstStyle/>
+          <a:p>
+            <a:endParaRPr lang="fr-FR"/>
+          </a:p>
+        </p:txBody>
       </p:sp>
       <p:sp>
         <p:nvSpPr>
@@ -7134,6 +7211,13 @@
             <a:prstDash val="solid"/>
           </a:ln>
         </p:spPr>
+        <p:txBody>
+          <a:bodyPr/>
+          <a:lstStyle/>
+          <a:p>
+            <a:endParaRPr lang="fr-FR"/>
+          </a:p>
+        </p:txBody>
       </p:sp>
       <p:sp>
         <p:nvSpPr>
@@ -7233,6 +7317,13 @@
             <a:prstDash val="solid"/>
           </a:ln>
         </p:spPr>
+        <p:txBody>
+          <a:bodyPr/>
+          <a:lstStyle/>
+          <a:p>
+            <a:endParaRPr lang="fr-FR"/>
+          </a:p>
+        </p:txBody>
       </p:sp>
       <p:sp>
         <p:nvSpPr>
@@ -7332,6 +7423,13 @@
             <a:prstDash val="solid"/>
           </a:ln>
         </p:spPr>
+        <p:txBody>
+          <a:bodyPr/>
+          <a:lstStyle/>
+          <a:p>
+            <a:endParaRPr lang="fr-FR"/>
+          </a:p>
+        </p:txBody>
       </p:sp>
       <p:sp>
         <p:nvSpPr>
@@ -7388,7 +7486,7 @@
         </p:spPr>
         <p:txBody>
           <a:bodyPr wrap="square" lIns="0" tIns="0" rIns="0" bIns="0" rtlCol="0" anchor="ctr">
-            <a:normAutofit/>
+            <a:normAutofit fontScale="92500" lnSpcReduction="20000"/>
           </a:bodyPr>
           <a:lstStyle/>
           <a:p>
@@ -7404,42 +7502,6 @@
               <a:t>Les faux négatifs sont les plus coûteux : ce sont des clients qui vont churner mais ne sont pas détectés. Le seuil bas augmente le recall, au prix de plus de faux positifs.</a:t>
             </a:r>
             <a:endParaRPr lang="en-US" sz="1150" dirty="0"/>
-          </a:p>
-        </p:txBody>
-      </p:sp>
-      <p:sp>
-        <p:nvSpPr>
-          <p:cNvPr id="30" name="Text 28"/>
-          <p:cNvSpPr/>
-          <p:nvPr/>
-        </p:nvSpPr>
-        <p:spPr>
-          <a:xfrm>
-            <a:off x="11201400" y="6446520"/>
-            <a:ext cx="640080" cy="182880"/>
-          </a:xfrm>
-          <a:prstGeom prst="rect">
-            <a:avLst/>
-          </a:prstGeom>
-          <a:noFill/>
-          <a:ln/>
-        </p:spPr>
-        <p:txBody>
-          <a:bodyPr wrap="square" lIns="0" tIns="0" rIns="0" bIns="0" rtlCol="0" anchor="ctr"/>
-          <a:lstStyle/>
-          <a:p>
-            <a:pPr marL="0" indent="0" algn="r">
-              <a:buNone/>
-            </a:pPr>
-            <a:r>
-              <a:rPr lang="en-US" sz="800" dirty="0">
-                <a:solidFill>
-                  <a:srgbClr val="64748B"/>
-                </a:solidFill>
-              </a:rPr>
-              <a:t>7/10</a:t>
-            </a:r>
-            <a:endParaRPr lang="en-US" sz="800" dirty="0"/>
           </a:p>
         </p:txBody>
       </p:sp>
@@ -7565,6 +7627,13 @@
             <a:prstDash val="solid"/>
           </a:ln>
         </p:spPr>
+        <p:txBody>
+          <a:bodyPr/>
+          <a:lstStyle/>
+          <a:p>
+            <a:endParaRPr lang="fr-FR"/>
+          </a:p>
+        </p:txBody>
       </p:sp>
       <p:sp>
         <p:nvSpPr>
@@ -7590,6 +7659,13 @@
             <a:prstDash val="solid"/>
           </a:ln>
         </p:spPr>
+        <p:txBody>
+          <a:bodyPr/>
+          <a:lstStyle/>
+          <a:p>
+            <a:endParaRPr lang="fr-FR"/>
+          </a:p>
+        </p:txBody>
       </p:sp>
       <p:sp>
         <p:nvSpPr>
@@ -7615,6 +7691,13 @@
             <a:prstDash val="solid"/>
           </a:ln>
         </p:spPr>
+        <p:txBody>
+          <a:bodyPr/>
+          <a:lstStyle/>
+          <a:p>
+            <a:endParaRPr lang="fr-FR"/>
+          </a:p>
+        </p:txBody>
       </p:sp>
       <p:sp>
         <p:nvSpPr>
@@ -7640,6 +7723,13 @@
             <a:prstDash val="solid"/>
           </a:ln>
         </p:spPr>
+        <p:txBody>
+          <a:bodyPr/>
+          <a:lstStyle/>
+          <a:p>
+            <a:endParaRPr lang="fr-FR"/>
+          </a:p>
+        </p:txBody>
       </p:sp>
       <p:sp>
         <p:nvSpPr>
@@ -7667,6 +7757,13 @@
             <a:prstDash val="solid"/>
           </a:ln>
         </p:spPr>
+        <p:txBody>
+          <a:bodyPr/>
+          <a:lstStyle/>
+          <a:p>
+            <a:endParaRPr lang="fr-FR"/>
+          </a:p>
+        </p:txBody>
       </p:sp>
       <p:sp>
         <p:nvSpPr>
@@ -7723,7 +7820,7 @@
         </p:spPr>
         <p:txBody>
           <a:bodyPr wrap="square" lIns="0" tIns="0" rIns="0" bIns="0" rtlCol="0" anchor="ctr">
-            <a:normAutofit/>
+            <a:normAutofit lnSpcReduction="10000"/>
           </a:bodyPr>
           <a:lstStyle/>
           <a:p>
@@ -7782,6 +7879,13 @@
             <a:prstDash val="solid"/>
           </a:ln>
         </p:spPr>
+        <p:txBody>
+          <a:bodyPr/>
+          <a:lstStyle/>
+          <a:p>
+            <a:endParaRPr lang="fr-FR"/>
+          </a:p>
+        </p:txBody>
       </p:sp>
       <p:sp>
         <p:nvSpPr>
@@ -7838,7 +7942,7 @@
         </p:spPr>
         <p:txBody>
           <a:bodyPr wrap="square" lIns="0" tIns="0" rIns="0" bIns="0" rtlCol="0" anchor="ctr">
-            <a:normAutofit/>
+            <a:normAutofit lnSpcReduction="10000"/>
           </a:bodyPr>
           <a:lstStyle/>
           <a:p>
@@ -7897,6 +8001,13 @@
             <a:prstDash val="solid"/>
           </a:ln>
         </p:spPr>
+        <p:txBody>
+          <a:bodyPr/>
+          <a:lstStyle/>
+          <a:p>
+            <a:endParaRPr lang="fr-FR"/>
+          </a:p>
+        </p:txBody>
       </p:sp>
       <p:sp>
         <p:nvSpPr>
@@ -7953,7 +8064,7 @@
         </p:spPr>
         <p:txBody>
           <a:bodyPr wrap="square" lIns="0" tIns="0" rIns="0" bIns="0" rtlCol="0" anchor="ctr">
-            <a:normAutofit/>
+            <a:normAutofit lnSpcReduction="10000"/>
           </a:bodyPr>
           <a:lstStyle/>
           <a:p>
@@ -8012,6 +8123,13 @@
             <a:prstDash val="solid"/>
           </a:ln>
         </p:spPr>
+        <p:txBody>
+          <a:bodyPr/>
+          <a:lstStyle/>
+          <a:p>
+            <a:endParaRPr lang="fr-FR"/>
+          </a:p>
+        </p:txBody>
       </p:sp>
       <p:sp>
         <p:nvSpPr>
@@ -8068,7 +8186,7 @@
         </p:spPr>
         <p:txBody>
           <a:bodyPr wrap="square" lIns="0" tIns="0" rIns="0" bIns="0" rtlCol="0" anchor="ctr">
-            <a:normAutofit/>
+            <a:normAutofit lnSpcReduction="10000"/>
           </a:bodyPr>
           <a:lstStyle/>
           <a:p>
@@ -8098,42 +8216,6 @@
               <a:t>+ décision</a:t>
             </a:r>
             <a:endParaRPr lang="en-US" sz="1150" dirty="0"/>
-          </a:p>
-        </p:txBody>
-      </p:sp>
-      <p:sp>
-        <p:nvSpPr>
-          <p:cNvPr id="26" name="Text 24"/>
-          <p:cNvSpPr/>
-          <p:nvPr/>
-        </p:nvSpPr>
-        <p:spPr>
-          <a:xfrm>
-            <a:off x="11201400" y="6446520"/>
-            <a:ext cx="640080" cy="182880"/>
-          </a:xfrm>
-          <a:prstGeom prst="rect">
-            <a:avLst/>
-          </a:prstGeom>
-          <a:noFill/>
-          <a:ln/>
-        </p:spPr>
-        <p:txBody>
-          <a:bodyPr wrap="square" lIns="0" tIns="0" rIns="0" bIns="0" rtlCol="0" anchor="ctr"/>
-          <a:lstStyle/>
-          <a:p>
-            <a:pPr marL="0" indent="0" algn="r">
-              <a:buNone/>
-            </a:pPr>
-            <a:r>
-              <a:rPr lang="en-US" sz="800" dirty="0">
-                <a:solidFill>
-                  <a:srgbClr val="64748B"/>
-                </a:solidFill>
-              </a:rPr>
-              <a:t>9/10</a:t>
-            </a:r>
-            <a:endParaRPr lang="en-US" sz="800" dirty="0"/>
           </a:p>
         </p:txBody>
       </p:sp>
@@ -8259,6 +8341,13 @@
             <a:prstDash val="solid"/>
           </a:ln>
         </p:spPr>
+        <p:txBody>
+          <a:bodyPr/>
+          <a:lstStyle/>
+          <a:p>
+            <a:endParaRPr lang="fr-FR"/>
+          </a:p>
+        </p:txBody>
       </p:sp>
       <p:sp>
         <p:nvSpPr>
@@ -8268,7 +8357,7 @@
         </p:nvSpPr>
         <p:spPr>
           <a:xfrm>
-            <a:off x="640080" y="1325880"/>
+            <a:off x="605790" y="2548890"/>
             <a:ext cx="4114800" cy="320040"/>
           </a:xfrm>
           <a:prstGeom prst="rect">
@@ -8304,7 +8393,7 @@
         </p:nvSpPr>
         <p:spPr>
           <a:xfrm>
-            <a:off x="685800" y="1783080"/>
+            <a:off x="617220" y="2411730"/>
             <a:ext cx="4480560" cy="1920240"/>
           </a:xfrm>
           <a:prstGeom prst="rect">
@@ -8372,7 +8461,7 @@
         </p:nvSpPr>
         <p:spPr>
           <a:xfrm>
-            <a:off x="5212080" y="2770632"/>
+            <a:off x="5017770" y="3017520"/>
             <a:ext cx="685800" cy="502920"/>
           </a:xfrm>
           <a:prstGeom prst="chevron">
@@ -8388,6 +8477,13 @@
             <a:prstDash val="solid"/>
           </a:ln>
         </p:spPr>
+        <p:txBody>
+          <a:bodyPr/>
+          <a:lstStyle/>
+          <a:p>
+            <a:endParaRPr lang="fr-FR"/>
+          </a:p>
+        </p:txBody>
       </p:sp>
       <p:sp>
         <p:nvSpPr>
@@ -8397,7 +8493,7 @@
         </p:nvSpPr>
         <p:spPr>
           <a:xfrm>
-            <a:off x="5989320" y="1325880"/>
+            <a:off x="5989320" y="1634490"/>
             <a:ext cx="5212080" cy="3794760"/>
           </a:xfrm>
           <a:prstGeom prst="roundRect">
@@ -8415,6 +8511,13 @@
             <a:prstDash val="solid"/>
           </a:ln>
         </p:spPr>
+        <p:txBody>
+          <a:bodyPr/>
+          <a:lstStyle/>
+          <a:p>
+            <a:endParaRPr lang="fr-FR"/>
+          </a:p>
+        </p:txBody>
       </p:sp>
       <p:sp>
         <p:nvSpPr>
@@ -8424,7 +8527,7 @@
         </p:nvSpPr>
         <p:spPr>
           <a:xfrm>
-            <a:off x="6355080" y="1600200"/>
+            <a:off x="6355080" y="1908810"/>
             <a:ext cx="3108960" cy="274320"/>
           </a:xfrm>
           <a:prstGeom prst="rect">
@@ -8460,7 +8563,7 @@
         </p:nvSpPr>
         <p:spPr>
           <a:xfrm>
-            <a:off x="6355080" y="2057400"/>
+            <a:off x="6355080" y="2366010"/>
             <a:ext cx="4297680" cy="731520"/>
           </a:xfrm>
           <a:prstGeom prst="rect">
@@ -8498,7 +8601,7 @@
         </p:nvSpPr>
         <p:spPr>
           <a:xfrm>
-            <a:off x="6355080" y="3246120"/>
+            <a:off x="6355080" y="3554730"/>
             <a:ext cx="2743200" cy="274320"/>
           </a:xfrm>
           <a:prstGeom prst="rect">
@@ -8534,7 +8637,7 @@
         </p:nvSpPr>
         <p:spPr>
           <a:xfrm>
-            <a:off x="6355080" y="3703320"/>
+            <a:off x="6355080" y="4011930"/>
             <a:ext cx="4480560" cy="731520"/>
           </a:xfrm>
           <a:prstGeom prst="rect">
@@ -8561,42 +8664,6 @@
               <a:t>Pipeline entraîné, modèle sauvegardé, API FastAPI et dashboard Streamlit pour simuler un client.</a:t>
             </a:r>
             <a:endParaRPr lang="en-US" sz="1400" dirty="0"/>
-          </a:p>
-        </p:txBody>
-      </p:sp>
-      <p:sp>
-        <p:nvSpPr>
-          <p:cNvPr id="13" name="Text 11"/>
-          <p:cNvSpPr/>
-          <p:nvPr/>
-        </p:nvSpPr>
-        <p:spPr>
-          <a:xfrm>
-            <a:off x="11201400" y="6446520"/>
-            <a:ext cx="640080" cy="182880"/>
-          </a:xfrm>
-          <a:prstGeom prst="rect">
-            <a:avLst/>
-          </a:prstGeom>
-          <a:noFill/>
-          <a:ln/>
-        </p:spPr>
-        <p:txBody>
-          <a:bodyPr wrap="square" lIns="0" tIns="0" rIns="0" bIns="0" rtlCol="0" anchor="ctr"/>
-          <a:lstStyle/>
-          <a:p>
-            <a:pPr marL="0" indent="0" algn="r">
-              <a:buNone/>
-            </a:pPr>
-            <a:r>
-              <a:rPr lang="en-US" sz="800" dirty="0">
-                <a:solidFill>
-                  <a:srgbClr val="64748B"/>
-                </a:solidFill>
-              </a:rPr>
-              <a:t>2/10</a:t>
-            </a:r>
-            <a:endParaRPr lang="en-US" sz="800" dirty="0"/>
           </a:p>
         </p:txBody>
       </p:sp>
@@ -8740,42 +8807,6 @@
           <a:lstStyle/>
           <a:p>
             <a:endParaRPr lang="fr-FR"/>
-          </a:p>
-        </p:txBody>
-      </p:sp>
-      <p:sp>
-        <p:nvSpPr>
-          <p:cNvPr id="24" name="Text 22"/>
-          <p:cNvSpPr/>
-          <p:nvPr/>
-        </p:nvSpPr>
-        <p:spPr>
-          <a:xfrm>
-            <a:off x="11201400" y="6446520"/>
-            <a:ext cx="640080" cy="182880"/>
-          </a:xfrm>
-          <a:prstGeom prst="rect">
-            <a:avLst/>
-          </a:prstGeom>
-          <a:noFill/>
-          <a:ln/>
-        </p:spPr>
-        <p:txBody>
-          <a:bodyPr wrap="square" lIns="0" tIns="0" rIns="0" bIns="0" rtlCol="0" anchor="ctr"/>
-          <a:lstStyle/>
-          <a:p>
-            <a:pPr marL="0" indent="0" algn="r">
-              <a:buNone/>
-            </a:pPr>
-            <a:r>
-              <a:rPr lang="en-US" sz="800" dirty="0">
-                <a:solidFill>
-                  <a:srgbClr val="64748B"/>
-                </a:solidFill>
-              </a:rPr>
-              <a:t>3/10</a:t>
-            </a:r>
-            <a:endParaRPr lang="en-US" sz="800" dirty="0"/>
           </a:p>
         </p:txBody>
       </p:sp>
@@ -9036,48 +9067,6 @@
           </a:p>
         </p:txBody>
       </p:sp>
-      <p:sp>
-        <p:nvSpPr>
-          <p:cNvPr id="24" name="Text 22">
-            <a:extLst>
-              <a:ext uri="{FF2B5EF4-FFF2-40B4-BE49-F238E27FC236}">
-                <a16:creationId xmlns:a16="http://schemas.microsoft.com/office/drawing/2014/main" id="{A9ED4AAA-F8C5-E288-92FA-F0ADF239BD51}"/>
-              </a:ext>
-            </a:extLst>
-          </p:cNvPr>
-          <p:cNvSpPr/>
-          <p:nvPr/>
-        </p:nvSpPr>
-        <p:spPr>
-          <a:xfrm>
-            <a:off x="11201400" y="6446520"/>
-            <a:ext cx="640080" cy="182880"/>
-          </a:xfrm>
-          <a:prstGeom prst="rect">
-            <a:avLst/>
-          </a:prstGeom>
-          <a:noFill/>
-          <a:ln/>
-        </p:spPr>
-        <p:txBody>
-          <a:bodyPr wrap="square" lIns="0" tIns="0" rIns="0" bIns="0" rtlCol="0" anchor="ctr"/>
-          <a:lstStyle/>
-          <a:p>
-            <a:pPr marL="0" indent="0" algn="r">
-              <a:buNone/>
-            </a:pPr>
-            <a:r>
-              <a:rPr lang="en-US" sz="800" dirty="0">
-                <a:solidFill>
-                  <a:srgbClr val="64748B"/>
-                </a:solidFill>
-              </a:rPr>
-              <a:t>3/10</a:t>
-            </a:r>
-            <a:endParaRPr lang="en-US" sz="800" dirty="0"/>
-          </a:p>
-        </p:txBody>
-      </p:sp>
       <p:pic>
         <p:nvPicPr>
           <p:cNvPr id="8" name="Image 7" descr="Une image contenant texte, diagramme, Tracé, Police  Le contenu généré par l’IA peut être incorrect.">
@@ -9164,7 +9153,7 @@
         </p:nvSpPr>
         <p:spPr>
           <a:xfrm>
-            <a:off x="502920" y="5296452"/>
+            <a:off x="502920" y="5044992"/>
             <a:ext cx="7113169" cy="978329"/>
           </a:xfrm>
           <a:prstGeom prst="rect">
@@ -9399,7 +9388,7 @@
         </p:nvSpPr>
         <p:spPr>
           <a:xfrm>
-            <a:off x="702920" y="1456161"/>
+            <a:off x="2039112" y="1508401"/>
             <a:ext cx="2926080" cy="256032"/>
           </a:xfrm>
           <a:prstGeom prst="rect">
@@ -9416,14 +9405,14 @@
               <a:buNone/>
             </a:pPr>
             <a:r>
-              <a:rPr lang="en-US" sz="1600" b="1" dirty="0">
+              <a:rPr lang="en-US" b="1" dirty="0">
                 <a:solidFill>
                   <a:srgbClr val="0F172A"/>
                 </a:solidFill>
               </a:rPr>
               <a:t>Répartition de la cible</a:t>
             </a:r>
-            <a:endParaRPr lang="en-US" sz="1600" dirty="0"/>
+            <a:endParaRPr lang="en-US" dirty="0"/>
           </a:p>
         </p:txBody>
       </p:sp>
@@ -9441,8 +9430,8 @@
         </p:nvSpPr>
         <p:spPr>
           <a:xfrm>
-            <a:off x="6165197" y="1283573"/>
-            <a:ext cx="5569208" cy="2516488"/>
+            <a:off x="6165197" y="1706484"/>
+            <a:ext cx="5569208" cy="1939680"/>
           </a:xfrm>
           <a:prstGeom prst="roundRect">
             <a:avLst>
@@ -9463,7 +9452,7 @@
           <a:bodyPr/>
           <a:lstStyle/>
           <a:p>
-            <a:endParaRPr lang="fr-FR"/>
+            <a:endParaRPr lang="fr-FR" dirty="0"/>
           </a:p>
         </p:txBody>
       </p:sp>
@@ -9481,7 +9470,7 @@
         </p:nvSpPr>
         <p:spPr>
           <a:xfrm>
-            <a:off x="6485237" y="1530461"/>
+            <a:off x="6485237" y="1953371"/>
             <a:ext cx="3478226" cy="490107"/>
           </a:xfrm>
           <a:prstGeom prst="rect">
@@ -9523,8 +9512,8 @@
         </p:nvSpPr>
         <p:spPr>
           <a:xfrm>
-            <a:off x="6485237" y="2014634"/>
-            <a:ext cx="4803162" cy="1312123"/>
+            <a:off x="6485236" y="2409188"/>
+            <a:ext cx="4803162" cy="958820"/>
           </a:xfrm>
           <a:prstGeom prst="rect">
             <a:avLst/>
@@ -9661,49 +9650,7 @@
               </a:rPr>
               <a:t> Recall, F1, ROC-AUC et surtout PR-AUC.</a:t>
             </a:r>
-            <a:endParaRPr lang="en-US" sz="1600"/>
-          </a:p>
-        </p:txBody>
-      </p:sp>
-      <p:sp>
-        <p:nvSpPr>
-          <p:cNvPr id="24" name="Text 22">
-            <a:extLst>
-              <a:ext uri="{FF2B5EF4-FFF2-40B4-BE49-F238E27FC236}">
-                <a16:creationId xmlns:a16="http://schemas.microsoft.com/office/drawing/2014/main" id="{313A61C0-D33E-ACDD-5B7E-EDFF7586C50B}"/>
-              </a:ext>
-            </a:extLst>
-          </p:cNvPr>
-          <p:cNvSpPr/>
-          <p:nvPr/>
-        </p:nvSpPr>
-        <p:spPr>
-          <a:xfrm>
-            <a:off x="11201400" y="6446520"/>
-            <a:ext cx="640080" cy="182880"/>
-          </a:xfrm>
-          <a:prstGeom prst="rect">
-            <a:avLst/>
-          </a:prstGeom>
-          <a:noFill/>
-          <a:ln/>
-        </p:spPr>
-        <p:txBody>
-          <a:bodyPr wrap="square" lIns="0" tIns="0" rIns="0" bIns="0" rtlCol="0" anchor="ctr"/>
-          <a:lstStyle/>
-          <a:p>
-            <a:pPr marL="0" indent="0" algn="r">
-              <a:buNone/>
-            </a:pPr>
-            <a:r>
-              <a:rPr lang="en-US" sz="800" dirty="0">
-                <a:solidFill>
-                  <a:srgbClr val="64748B"/>
-                </a:solidFill>
-              </a:rPr>
-              <a:t>3/10</a:t>
-            </a:r>
-            <a:endParaRPr lang="en-US" sz="800" dirty="0"/>
+            <a:endParaRPr lang="en-US" sz="1600" dirty="0"/>
           </a:p>
         </p:txBody>
       </p:sp>
@@ -9751,8 +9698,8 @@
         </p:nvSpPr>
         <p:spPr>
           <a:xfrm>
-            <a:off x="6157500" y="3900542"/>
-            <a:ext cx="5569208" cy="2516488"/>
+            <a:off x="6157500" y="3935492"/>
+            <a:ext cx="5569208" cy="2481538"/>
           </a:xfrm>
           <a:prstGeom prst="roundRect">
             <a:avLst>
@@ -9791,7 +9738,7 @@
         </p:nvSpPr>
         <p:spPr>
           <a:xfrm>
-            <a:off x="6477540" y="4147430"/>
+            <a:off x="6477540" y="4090280"/>
             <a:ext cx="3478226" cy="490107"/>
           </a:xfrm>
           <a:prstGeom prst="rect">
@@ -10410,14 +10357,14 @@
               <a:buNone/>
             </a:pPr>
             <a:r>
-              <a:rPr lang="en-US" sz="1800" b="1">
+              <a:rPr lang="en-US" sz="1800" b="1" dirty="0">
                 <a:solidFill>
                   <a:srgbClr val="0F172A"/>
                 </a:solidFill>
               </a:rPr>
               <a:t>Dataset</a:t>
             </a:r>
-            <a:endParaRPr lang="en-US" sz="1800"/>
+            <a:endParaRPr lang="en-US" sz="1800" dirty="0"/>
           </a:p>
         </p:txBody>
       </p:sp>
@@ -10689,7 +10636,7 @@
           <a:bodyPr/>
           <a:lstStyle/>
           <a:p>
-            <a:endParaRPr lang="fr-FR"/>
+            <a:endParaRPr lang="fr-FR" dirty="0"/>
           </a:p>
         </p:txBody>
       </p:sp>
@@ -10718,14 +10665,14 @@
               <a:buNone/>
             </a:pPr>
             <a:r>
-              <a:rPr lang="en-US" sz="1800" b="1">
+              <a:rPr lang="en-US" sz="1800" b="1" dirty="0" err="1">
                 <a:solidFill>
                   <a:srgbClr val="2563EB"/>
                 </a:solidFill>
               </a:rPr>
               <a:t>Prétraitement</a:t>
             </a:r>
-            <a:endParaRPr lang="en-US" sz="1800"/>
+            <a:endParaRPr lang="en-US" sz="1800" dirty="0"/>
           </a:p>
         </p:txBody>
       </p:sp>
@@ -11105,42 +11052,6 @@
       </p:sp>
       <p:sp>
         <p:nvSpPr>
-          <p:cNvPr id="28" name="Text 26"/>
-          <p:cNvSpPr/>
-          <p:nvPr/>
-        </p:nvSpPr>
-        <p:spPr>
-          <a:xfrm>
-            <a:off x="11201400" y="6446520"/>
-            <a:ext cx="640080" cy="182880"/>
-          </a:xfrm>
-          <a:prstGeom prst="rect">
-            <a:avLst/>
-          </a:prstGeom>
-          <a:noFill/>
-          <a:ln/>
-        </p:spPr>
-        <p:txBody>
-          <a:bodyPr wrap="square" lIns="0" tIns="0" rIns="0" bIns="0" rtlCol="0" anchor="ctr"/>
-          <a:lstStyle/>
-          <a:p>
-            <a:pPr marL="0" indent="0" algn="r">
-              <a:buNone/>
-            </a:pPr>
-            <a:r>
-              <a:rPr lang="en-US" sz="800" dirty="0">
-                <a:solidFill>
-                  <a:srgbClr val="64748B"/>
-                </a:solidFill>
-              </a:rPr>
-              <a:t>4/10</a:t>
-            </a:r>
-            <a:endParaRPr lang="en-US" sz="800" dirty="0"/>
-          </a:p>
-        </p:txBody>
-      </p:sp>
-      <p:sp>
-        <p:nvSpPr>
           <p:cNvPr id="25" name="Shape 19">
             <a:extLst>
               <a:ext uri="{FF2B5EF4-FFF2-40B4-BE49-F238E27FC236}">
@@ -11153,8 +11064,8 @@
         </p:nvSpPr>
         <p:spPr>
           <a:xfrm>
-            <a:off x="621475" y="4173342"/>
-            <a:ext cx="9871473" cy="2516488"/>
+            <a:off x="2720339" y="4469129"/>
+            <a:ext cx="6743701" cy="1783079"/>
           </a:xfrm>
           <a:prstGeom prst="roundRect">
             <a:avLst>
@@ -11162,11 +11073,11 @@
             </a:avLst>
           </a:prstGeom>
           <a:solidFill>
-            <a:srgbClr val="FFFBEB"/>
+            <a:srgbClr val="EFF6FF"/>
           </a:solidFill>
           <a:ln w="12700">
             <a:solidFill>
-              <a:srgbClr val="FDE68A"/>
+              <a:srgbClr val="BFDBFE"/>
             </a:solidFill>
             <a:prstDash val="solid"/>
           </a:ln>
@@ -11175,7 +11086,11 @@
           <a:bodyPr/>
           <a:lstStyle/>
           <a:p>
-            <a:endParaRPr lang="fr-FR"/>
+            <a:endParaRPr lang="fr-FR" dirty="0">
+              <a:solidFill>
+                <a:schemeClr val="tx1"/>
+              </a:solidFill>
+            </a:endParaRPr>
           </a:p>
         </p:txBody>
       </p:sp>
@@ -11193,7 +11108,7 @@
         </p:nvSpPr>
         <p:spPr>
           <a:xfrm>
-            <a:off x="995186" y="4412533"/>
+            <a:off x="2995436" y="4641133"/>
             <a:ext cx="6162084" cy="490107"/>
           </a:xfrm>
           <a:prstGeom prst="rect">
@@ -11210,9 +11125,9 @@
               <a:buNone/>
             </a:pPr>
             <a:r>
-              <a:rPr lang="en-US" sz="1700" b="1">
-                <a:solidFill>
-                  <a:srgbClr val="92400E"/>
+              <a:rPr lang="en-US" b="1" dirty="0">
+                <a:solidFill>
+                  <a:srgbClr val="2563EB"/>
                 </a:solidFill>
               </a:rPr>
               <a:t>Split</a:t>
@@ -11234,7 +11149,7 @@
         </p:nvSpPr>
         <p:spPr>
           <a:xfrm>
-            <a:off x="995186" y="4896706"/>
+            <a:off x="2995436" y="4859610"/>
             <a:ext cx="8512011" cy="1312123"/>
           </a:xfrm>
           <a:prstGeom prst="rect">
@@ -11250,7 +11165,7 @@
           <a:lstStyle/>
           <a:p>
             <a:r>
-              <a:rPr lang="en-US" sz="1600">
+              <a:rPr lang="en-US" sz="1600" dirty="0">
                 <a:solidFill>
                   <a:srgbClr val="0F172A"/>
                 </a:solidFill>
@@ -11546,48 +11461,6 @@
           </a:p>
         </p:txBody>
       </p:sp>
-      <p:sp>
-        <p:nvSpPr>
-          <p:cNvPr id="28" name="Text 26">
-            <a:extLst>
-              <a:ext uri="{FF2B5EF4-FFF2-40B4-BE49-F238E27FC236}">
-                <a16:creationId xmlns:a16="http://schemas.microsoft.com/office/drawing/2014/main" id="{13FC6A67-3338-1410-A721-6AF5FCC3A4A8}"/>
-              </a:ext>
-            </a:extLst>
-          </p:cNvPr>
-          <p:cNvSpPr/>
-          <p:nvPr/>
-        </p:nvSpPr>
-        <p:spPr>
-          <a:xfrm>
-            <a:off x="11201400" y="6446520"/>
-            <a:ext cx="640080" cy="182880"/>
-          </a:xfrm>
-          <a:prstGeom prst="rect">
-            <a:avLst/>
-          </a:prstGeom>
-          <a:noFill/>
-          <a:ln/>
-        </p:spPr>
-        <p:txBody>
-          <a:bodyPr wrap="square" lIns="0" tIns="0" rIns="0" bIns="0" rtlCol="0" anchor="ctr"/>
-          <a:lstStyle/>
-          <a:p>
-            <a:pPr marL="0" indent="0" algn="r">
-              <a:buNone/>
-            </a:pPr>
-            <a:r>
-              <a:rPr lang="en-US" sz="800" dirty="0">
-                <a:solidFill>
-                  <a:srgbClr val="64748B"/>
-                </a:solidFill>
-              </a:rPr>
-              <a:t>4/10</a:t>
-            </a:r>
-            <a:endParaRPr lang="en-US" sz="800" dirty="0"/>
-          </a:p>
-        </p:txBody>
-      </p:sp>
       <p:pic>
         <p:nvPicPr>
           <p:cNvPr id="5" name="Image 4" descr="Une image contenant texte, Police, capture d’écran, ligne  Le contenu généré par l’IA peut être incorrect.">
@@ -12508,316 +12381,6 @@
           </a:p>
         </p:txBody>
       </p:sp>
-      <p:sp>
-        <p:nvSpPr>
-          <p:cNvPr id="19" name="Text 17"/>
-          <p:cNvSpPr/>
-          <p:nvPr/>
-        </p:nvSpPr>
-        <p:spPr>
-          <a:xfrm>
-            <a:off x="11201400" y="6446520"/>
-            <a:ext cx="640080" cy="182880"/>
-          </a:xfrm>
-          <a:prstGeom prst="rect">
-            <a:avLst/>
-          </a:prstGeom>
-          <a:noFill/>
-          <a:ln/>
-        </p:spPr>
-        <p:txBody>
-          <a:bodyPr wrap="square" lIns="0" tIns="0" rIns="0" bIns="0" rtlCol="0" anchor="ctr"/>
-          <a:lstStyle/>
-          <a:p>
-            <a:pPr marL="0" indent="0" algn="r">
-              <a:buNone/>
-            </a:pPr>
-            <a:r>
-              <a:rPr lang="en-US" sz="800" dirty="0">
-                <a:solidFill>
-                  <a:srgbClr val="64748B"/>
-                </a:solidFill>
-              </a:rPr>
-              <a:t>5/10</a:t>
-            </a:r>
-            <a:endParaRPr lang="en-US" sz="800" dirty="0"/>
-          </a:p>
-        </p:txBody>
-      </p:sp>
-      <p:sp>
-        <p:nvSpPr>
-          <p:cNvPr id="21" name="Shape 19">
-            <a:extLst>
-              <a:ext uri="{FF2B5EF4-FFF2-40B4-BE49-F238E27FC236}">
-                <a16:creationId xmlns:a16="http://schemas.microsoft.com/office/drawing/2014/main" id="{3AD371BD-8A74-A46A-BAF2-751E3DDCE2EF}"/>
-              </a:ext>
-            </a:extLst>
-          </p:cNvPr>
-          <p:cNvSpPr/>
-          <p:nvPr/>
-        </p:nvSpPr>
-        <p:spPr>
-          <a:xfrm>
-            <a:off x="6141220" y="1380000"/>
-            <a:ext cx="5569208" cy="2516488"/>
-          </a:xfrm>
-          <a:prstGeom prst="roundRect">
-            <a:avLst>
-              <a:gd name="adj" fmla="val 5161"/>
-            </a:avLst>
-          </a:prstGeom>
-          <a:solidFill>
-            <a:srgbClr val="FFFBEB"/>
-          </a:solidFill>
-          <a:ln w="12700">
-            <a:solidFill>
-              <a:srgbClr val="FDE68A"/>
-            </a:solidFill>
-            <a:prstDash val="solid"/>
-          </a:ln>
-        </p:spPr>
-        <p:txBody>
-          <a:bodyPr/>
-          <a:lstStyle/>
-          <a:p>
-            <a:endParaRPr lang="fr-FR"/>
-          </a:p>
-        </p:txBody>
-      </p:sp>
-      <p:sp>
-        <p:nvSpPr>
-          <p:cNvPr id="23" name="Text 20">
-            <a:extLst>
-              <a:ext uri="{FF2B5EF4-FFF2-40B4-BE49-F238E27FC236}">
-                <a16:creationId xmlns:a16="http://schemas.microsoft.com/office/drawing/2014/main" id="{1EF255A0-62E4-36FD-C531-A60912D45087}"/>
-              </a:ext>
-            </a:extLst>
-          </p:cNvPr>
-          <p:cNvSpPr/>
-          <p:nvPr/>
-        </p:nvSpPr>
-        <p:spPr>
-          <a:xfrm>
-            <a:off x="6461260" y="1627000"/>
-            <a:ext cx="1961923" cy="482411"/>
-          </a:xfrm>
-          <a:prstGeom prst="rect">
-            <a:avLst/>
-          </a:prstGeom>
-          <a:noFill/>
-          <a:ln/>
-        </p:spPr>
-        <p:txBody>
-          <a:bodyPr wrap="square" lIns="0" tIns="0" rIns="0" bIns="0" rtlCol="0" anchor="ctr"/>
-          <a:lstStyle/>
-          <a:p>
-            <a:pPr marL="0" indent="0">
-              <a:buNone/>
-            </a:pPr>
-            <a:r>
-              <a:rPr lang="en-US" sz="1700" dirty="0" err="1">
-                <a:solidFill>
-                  <a:srgbClr val="92400E"/>
-                </a:solidFill>
-                <a:ea typeface="+mn-lt"/>
-                <a:cs typeface="+mn-lt"/>
-              </a:rPr>
-              <a:t>Avantages</a:t>
-            </a:r>
-            <a:endParaRPr lang="fr-FR" dirty="0" err="1"/>
-          </a:p>
-        </p:txBody>
-      </p:sp>
-      <p:sp>
-        <p:nvSpPr>
-          <p:cNvPr id="25" name="Text 21">
-            <a:extLst>
-              <a:ext uri="{FF2B5EF4-FFF2-40B4-BE49-F238E27FC236}">
-                <a16:creationId xmlns:a16="http://schemas.microsoft.com/office/drawing/2014/main" id="{926DAA02-7C45-D4E6-DF31-C7BD2DC76E94}"/>
-              </a:ext>
-            </a:extLst>
-          </p:cNvPr>
-          <p:cNvSpPr/>
-          <p:nvPr/>
-        </p:nvSpPr>
-        <p:spPr>
-          <a:xfrm>
-            <a:off x="6461260" y="2100000"/>
-            <a:ext cx="1962981" cy="1327515"/>
-          </a:xfrm>
-          <a:prstGeom prst="rect">
-            <a:avLst/>
-          </a:prstGeom>
-          <a:noFill/>
-          <a:ln/>
-        </p:spPr>
-        <p:txBody>
-          <a:bodyPr wrap="square" lIns="0" tIns="0" rIns="0" bIns="0" rtlCol="0" anchor="ctr">
-            <a:normAutofit/>
-          </a:bodyPr>
-          <a:lstStyle/>
-          <a:p>
-            <a:pPr marL="285750" indent="-285750">
-              <a:buFont typeface="Calibri"/>
-              <a:buChar char="-"/>
-            </a:pPr>
-            <a:r>
-              <a:rPr lang="en-US" sz="1600">
-                <a:solidFill>
-                  <a:srgbClr val="0F172A"/>
-                </a:solidFill>
-              </a:rPr>
-              <a:t>Simple</a:t>
-            </a:r>
-            <a:endParaRPr lang="fr-FR"/>
-          </a:p>
-          <a:p>
-            <a:pPr marL="285750" indent="-285750">
-              <a:buFont typeface="Calibri"/>
-              <a:buChar char="-"/>
-            </a:pPr>
-            <a:r>
-              <a:rPr lang="en-US" sz="1600" dirty="0" err="1">
-                <a:solidFill>
-                  <a:srgbClr val="0F172A"/>
-                </a:solidFill>
-              </a:rPr>
-              <a:t>Rapide</a:t>
-            </a:r>
-          </a:p>
-          <a:p>
-            <a:pPr marL="285750" indent="-285750">
-              <a:buFont typeface="Calibri"/>
-              <a:buChar char="-"/>
-            </a:pPr>
-            <a:r>
-              <a:rPr lang="en-US" sz="1600" dirty="0" err="1">
-                <a:solidFill>
-                  <a:srgbClr val="0F172A"/>
-                </a:solidFill>
-              </a:rPr>
-              <a:t>Interprétable</a:t>
-            </a:r>
-          </a:p>
-        </p:txBody>
-      </p:sp>
-      <p:sp>
-        <p:nvSpPr>
-          <p:cNvPr id="26" name="Text 20">
-            <a:extLst>
-              <a:ext uri="{FF2B5EF4-FFF2-40B4-BE49-F238E27FC236}">
-                <a16:creationId xmlns:a16="http://schemas.microsoft.com/office/drawing/2014/main" id="{6DA8A0C0-9FCC-544E-4377-57905EB0CF8D}"/>
-              </a:ext>
-            </a:extLst>
-          </p:cNvPr>
-          <p:cNvSpPr/>
-          <p:nvPr/>
-        </p:nvSpPr>
-        <p:spPr>
-          <a:xfrm>
-            <a:off x="9447684" y="1627000"/>
-            <a:ext cx="1961923" cy="482411"/>
-          </a:xfrm>
-          <a:prstGeom prst="rect">
-            <a:avLst/>
-          </a:prstGeom>
-          <a:noFill/>
-          <a:ln/>
-        </p:spPr>
-        <p:txBody>
-          <a:bodyPr wrap="square" lIns="0" tIns="0" rIns="0" bIns="0" rtlCol="0" anchor="ctr"/>
-          <a:lstStyle/>
-          <a:p>
-            <a:pPr marL="0" indent="0">
-              <a:buNone/>
-            </a:pPr>
-            <a:r>
-              <a:rPr lang="en-US" sz="1700" dirty="0" err="1">
-                <a:solidFill>
-                  <a:srgbClr val="92400E"/>
-                </a:solidFill>
-                <a:ea typeface="+mn-lt"/>
-                <a:cs typeface="+mn-lt"/>
-              </a:rPr>
-              <a:t>Inconvéniants</a:t>
-            </a:r>
-            <a:endParaRPr lang="fr-FR" dirty="0" err="1"/>
-          </a:p>
-        </p:txBody>
-      </p:sp>
-      <p:sp>
-        <p:nvSpPr>
-          <p:cNvPr id="27" name="Text 21">
-            <a:extLst>
-              <a:ext uri="{FF2B5EF4-FFF2-40B4-BE49-F238E27FC236}">
-                <a16:creationId xmlns:a16="http://schemas.microsoft.com/office/drawing/2014/main" id="{9F7B92D2-7EED-B46F-60F3-9CE4E4371413}"/>
-              </a:ext>
-            </a:extLst>
-          </p:cNvPr>
-          <p:cNvSpPr/>
-          <p:nvPr/>
-        </p:nvSpPr>
-        <p:spPr>
-          <a:xfrm>
-            <a:off x="9286047" y="1980000"/>
-            <a:ext cx="1962981" cy="1327515"/>
-          </a:xfrm>
-          <a:prstGeom prst="rect">
-            <a:avLst/>
-          </a:prstGeom>
-          <a:noFill/>
-          <a:ln/>
-        </p:spPr>
-        <p:txBody>
-          <a:bodyPr wrap="square" lIns="0" tIns="0" rIns="0" bIns="0" rtlCol="0" anchor="ctr">
-            <a:normAutofit/>
-          </a:bodyPr>
-          <a:lstStyle/>
-          <a:p>
-            <a:pPr marL="285750" indent="-285750">
-              <a:buFont typeface="Calibri"/>
-              <a:buChar char="-"/>
-            </a:pPr>
-            <a:r>
-              <a:rPr lang="en-US" sz="1600" dirty="0" err="1">
-                <a:solidFill>
-                  <a:srgbClr val="0F172A"/>
-                </a:solidFill>
-              </a:rPr>
-              <a:t>Peut</a:t>
-            </a:r>
-            <a:r>
-              <a:rPr lang="en-US" sz="1600" dirty="0">
-                <a:solidFill>
-                  <a:srgbClr val="0F172A"/>
-                </a:solidFill>
-              </a:rPr>
-              <a:t> </a:t>
-            </a:r>
-            <a:r>
-              <a:rPr lang="en-US" sz="1600" dirty="0" err="1">
-                <a:solidFill>
-                  <a:srgbClr val="0F172A"/>
-                </a:solidFill>
-              </a:rPr>
-              <a:t>avoir</a:t>
-            </a:r>
-            <a:r>
-              <a:rPr lang="en-US" sz="1600" dirty="0">
-                <a:solidFill>
-                  <a:srgbClr val="0F172A"/>
-                </a:solidFill>
-              </a:rPr>
-              <a:t> du mal avec les relations complexes entre les variables</a:t>
-            </a:r>
-            <a:endParaRPr lang="fr-FR" dirty="0">
-              <a:solidFill>
-                <a:srgbClr val="000000"/>
-              </a:solidFill>
-            </a:endParaRPr>
-          </a:p>
-        </p:txBody>
-      </p:sp>
       <p:pic>
         <p:nvPicPr>
           <p:cNvPr id="8" name="Image 7" descr="Une image contenant texte, Police, capture d’écran  Le contenu généré par l’IA peut être incorrect.">
@@ -12840,7 +12403,7 @@
         </p:blipFill>
         <p:spPr>
           <a:xfrm>
-            <a:off x="550000" y="4350000"/>
+            <a:off x="550000" y="4315710"/>
             <a:ext cx="4648200" cy="1885950"/>
           </a:xfrm>
           <a:prstGeom prst="rect">
@@ -12862,7 +12425,7 @@
         </p:nvSpPr>
         <p:spPr>
           <a:xfrm>
-            <a:off x="6550000" y="4334614"/>
+            <a:off x="6473402" y="4287910"/>
             <a:ext cx="5011860" cy="1856600"/>
           </a:xfrm>
           <a:prstGeom prst="roundRect">
@@ -13076,6 +12639,217 @@
           </a:p>
         </p:txBody>
       </p:sp>
+      <p:graphicFrame>
+        <p:nvGraphicFramePr>
+          <p:cNvPr id="14" name="Tableau 13">
+            <a:extLst>
+              <a:ext uri="{FF2B5EF4-FFF2-40B4-BE49-F238E27FC236}">
+                <a16:creationId xmlns:a16="http://schemas.microsoft.com/office/drawing/2014/main" id="{611FDE42-C98D-B525-6E29-524B2642AC72}"/>
+              </a:ext>
+            </a:extLst>
+          </p:cNvPr>
+          <p:cNvGraphicFramePr>
+            <a:graphicFrameLocks noGrp="1"/>
+          </p:cNvGraphicFramePr>
+          <p:nvPr>
+            <p:extLst>
+              <p:ext uri="{D42A27DB-BD31-4B8C-83A1-F6EECF244321}">
+                <p14:modId xmlns:p14="http://schemas.microsoft.com/office/powerpoint/2010/main" val="2252547949"/>
+              </p:ext>
+            </p:extLst>
+          </p:nvPr>
+        </p:nvGraphicFramePr>
+        <p:xfrm>
+          <a:off x="6080760" y="1820000"/>
+          <a:ext cx="5797144" cy="1188893"/>
+        </p:xfrm>
+        <a:graphic>
+          <a:graphicData uri="http://schemas.openxmlformats.org/drawingml/2006/table">
+            <a:tbl>
+              <a:tblPr firstRow="1" bandRow="1">
+                <a:tableStyleId>{073A0DAA-6AF3-43AB-8588-CEC1D06C72B9}</a:tableStyleId>
+              </a:tblPr>
+              <a:tblGrid>
+                <a:gridCol w="2898572">
+                  <a:extLst>
+                    <a:ext uri="{9D8B030D-6E8A-4147-A177-3AD203B41FA5}">
+                      <a16:colId xmlns:a16="http://schemas.microsoft.com/office/drawing/2014/main" val="3095843017"/>
+                    </a:ext>
+                  </a:extLst>
+                </a:gridCol>
+                <a:gridCol w="2898572">
+                  <a:extLst>
+                    <a:ext uri="{9D8B030D-6E8A-4147-A177-3AD203B41FA5}">
+                      <a16:colId xmlns:a16="http://schemas.microsoft.com/office/drawing/2014/main" val="1561732748"/>
+                    </a:ext>
+                  </a:extLst>
+                </a:gridCol>
+              </a:tblGrid>
+              <a:tr h="365933">
+                <a:tc>
+                  <a:txBody>
+                    <a:bodyPr/>
+                    <a:lstStyle/>
+                    <a:p>
+                      <a:r>
+                        <a:rPr lang="fr-FR" dirty="0"/>
+                        <a:t>Avantages</a:t>
+                      </a:r>
+                    </a:p>
+                  </a:txBody>
+                  <a:tcPr/>
+                </a:tc>
+                <a:tc>
+                  <a:txBody>
+                    <a:bodyPr/>
+                    <a:lstStyle/>
+                    <a:p>
+                      <a:r>
+                        <a:rPr lang="en-US" sz="1800" dirty="0" err="1">
+                          <a:solidFill>
+                            <a:schemeClr val="bg1"/>
+                          </a:solidFill>
+                          <a:ea typeface="+mn-lt"/>
+                          <a:cs typeface="+mn-lt"/>
+                        </a:rPr>
+                        <a:t>Inconvénients</a:t>
+                      </a:r>
+                      <a:endParaRPr lang="fr-FR" dirty="0">
+                        <a:solidFill>
+                          <a:schemeClr val="bg1"/>
+                        </a:solidFill>
+                      </a:endParaRPr>
+                    </a:p>
+                  </a:txBody>
+                  <a:tcPr/>
+                </a:tc>
+                <a:extLst>
+                  <a:ext uri="{0D108BD9-81ED-4DB2-BD59-A6C34878D82A}">
+                    <a16:rowId xmlns:a16="http://schemas.microsoft.com/office/drawing/2014/main" val="3615889654"/>
+                  </a:ext>
+                </a:extLst>
+              </a:tr>
+              <a:tr h="370840">
+                <a:tc>
+                  <a:txBody>
+                    <a:bodyPr/>
+                    <a:lstStyle/>
+                    <a:p>
+                      <a:pPr marL="285750" indent="-285750">
+                        <a:buFont typeface="Calibri"/>
+                        <a:buChar char="-"/>
+                      </a:pPr>
+                      <a:r>
+                        <a:rPr lang="en-US" sz="1600" dirty="0">
+                          <a:solidFill>
+                            <a:srgbClr val="0F172A"/>
+                          </a:solidFill>
+                        </a:rPr>
+                        <a:t>Simple</a:t>
+                      </a:r>
+                      <a:endParaRPr lang="fr-FR" sz="1600" dirty="0"/>
+                    </a:p>
+                    <a:p>
+                      <a:pPr marL="285750" indent="-285750">
+                        <a:buFont typeface="Calibri"/>
+                        <a:buChar char="-"/>
+                      </a:pPr>
+                      <a:r>
+                        <a:rPr lang="en-US" sz="1600" dirty="0" err="1">
+                          <a:solidFill>
+                            <a:srgbClr val="0F172A"/>
+                          </a:solidFill>
+                        </a:rPr>
+                        <a:t>Rapide</a:t>
+                      </a:r>
+                      <a:endParaRPr lang="en-US" sz="1600" dirty="0">
+                        <a:solidFill>
+                          <a:srgbClr val="0F172A"/>
+                        </a:solidFill>
+                      </a:endParaRPr>
+                    </a:p>
+                    <a:p>
+                      <a:pPr marL="285750" indent="-285750">
+                        <a:buFont typeface="Calibri"/>
+                        <a:buChar char="-"/>
+                      </a:pPr>
+                      <a:r>
+                        <a:rPr lang="en-US" sz="1600" dirty="0" err="1">
+                          <a:solidFill>
+                            <a:srgbClr val="0F172A"/>
+                          </a:solidFill>
+                        </a:rPr>
+                        <a:t>Interprétable</a:t>
+                      </a:r>
+                      <a:endParaRPr lang="en-US" sz="1600" dirty="0">
+                        <a:solidFill>
+                          <a:srgbClr val="0F172A"/>
+                        </a:solidFill>
+                      </a:endParaRPr>
+                    </a:p>
+                  </a:txBody>
+                  <a:tcPr/>
+                </a:tc>
+                <a:tc>
+                  <a:txBody>
+                    <a:bodyPr/>
+                    <a:lstStyle/>
+                    <a:p>
+                      <a:pPr marL="285750" indent="-285750">
+                        <a:buFont typeface="Calibri"/>
+                        <a:buChar char="-"/>
+                      </a:pPr>
+                      <a:r>
+                        <a:rPr lang="en-US" sz="1600" dirty="0" err="1">
+                          <a:solidFill>
+                            <a:srgbClr val="0F172A"/>
+                          </a:solidFill>
+                        </a:rPr>
+                        <a:t>Peut</a:t>
+                      </a:r>
+                      <a:r>
+                        <a:rPr lang="en-US" sz="1600" dirty="0">
+                          <a:solidFill>
+                            <a:srgbClr val="0F172A"/>
+                          </a:solidFill>
+                        </a:rPr>
+                        <a:t> </a:t>
+                      </a:r>
+                      <a:r>
+                        <a:rPr lang="en-US" sz="1600" dirty="0" err="1">
+                          <a:solidFill>
+                            <a:srgbClr val="0F172A"/>
+                          </a:solidFill>
+                        </a:rPr>
+                        <a:t>avoir</a:t>
+                      </a:r>
+                      <a:r>
+                        <a:rPr lang="en-US" sz="1600" dirty="0">
+                          <a:solidFill>
+                            <a:srgbClr val="0F172A"/>
+                          </a:solidFill>
+                        </a:rPr>
+                        <a:t> du mal avec les relations complexes entre les variables</a:t>
+                      </a:r>
+                      <a:endParaRPr lang="fr-FR" sz="1600" dirty="0">
+                        <a:solidFill>
+                          <a:srgbClr val="000000"/>
+                        </a:solidFill>
+                      </a:endParaRPr>
+                    </a:p>
+                  </a:txBody>
+                  <a:tcPr/>
+                </a:tc>
+                <a:extLst>
+                  <a:ext uri="{0D108BD9-81ED-4DB2-BD59-A6C34878D82A}">
+                    <a16:rowId xmlns:a16="http://schemas.microsoft.com/office/drawing/2014/main" val="628995668"/>
+                  </a:ext>
+                </a:extLst>
+              </a:tr>
+            </a:tbl>
+          </a:graphicData>
+        </a:graphic>
+      </p:graphicFrame>
     </p:spTree>
   </p:cSld>
   <p:clrMapOvr>
@@ -13232,529 +13006,6 @@
       </p:sp>
       <p:sp>
         <p:nvSpPr>
-          <p:cNvPr id="19" name="Text 17">
-            <a:extLst>
-              <a:ext uri="{FF2B5EF4-FFF2-40B4-BE49-F238E27FC236}">
-                <a16:creationId xmlns:a16="http://schemas.microsoft.com/office/drawing/2014/main" id="{D47E2480-CD42-BB3D-843B-FE677AA8A12B}"/>
-              </a:ext>
-            </a:extLst>
-          </p:cNvPr>
-          <p:cNvSpPr/>
-          <p:nvPr/>
-        </p:nvSpPr>
-        <p:spPr>
-          <a:xfrm>
-            <a:off x="11201400" y="6446520"/>
-            <a:ext cx="640080" cy="182880"/>
-          </a:xfrm>
-          <a:prstGeom prst="rect">
-            <a:avLst/>
-          </a:prstGeom>
-          <a:noFill/>
-          <a:ln/>
-        </p:spPr>
-        <p:txBody>
-          <a:bodyPr wrap="square" lIns="0" tIns="0" rIns="0" bIns="0" rtlCol="0" anchor="ctr"/>
-          <a:lstStyle/>
-          <a:p>
-            <a:pPr marL="0" indent="0" algn="r">
-              <a:buNone/>
-            </a:pPr>
-            <a:r>
-              <a:rPr lang="en-US" sz="800" dirty="0">
-                <a:solidFill>
-                  <a:srgbClr val="64748B"/>
-                </a:solidFill>
-              </a:rPr>
-              <a:t>5/10</a:t>
-            </a:r>
-            <a:endParaRPr lang="en-US" sz="800" dirty="0"/>
-          </a:p>
-        </p:txBody>
-      </p:sp>
-      <p:sp>
-        <p:nvSpPr>
-          <p:cNvPr id="21" name="Shape 19">
-            <a:extLst>
-              <a:ext uri="{FF2B5EF4-FFF2-40B4-BE49-F238E27FC236}">
-                <a16:creationId xmlns:a16="http://schemas.microsoft.com/office/drawing/2014/main" id="{452967E6-872F-662E-FABB-B50722DDB5E2}"/>
-              </a:ext>
-            </a:extLst>
-          </p:cNvPr>
-          <p:cNvSpPr/>
-          <p:nvPr/>
-        </p:nvSpPr>
-        <p:spPr>
-          <a:xfrm>
-            <a:off x="6141220" y="1380000"/>
-            <a:ext cx="5569208" cy="2516488"/>
-          </a:xfrm>
-          <a:prstGeom prst="roundRect">
-            <a:avLst>
-              <a:gd name="adj" fmla="val 5161"/>
-            </a:avLst>
-          </a:prstGeom>
-          <a:solidFill>
-            <a:srgbClr val="FFFBEB"/>
-          </a:solidFill>
-          <a:ln w="12700">
-            <a:solidFill>
-              <a:srgbClr val="FDE68A"/>
-            </a:solidFill>
-            <a:prstDash val="solid"/>
-          </a:ln>
-        </p:spPr>
-        <p:txBody>
-          <a:bodyPr/>
-          <a:lstStyle/>
-          <a:p>
-            <a:endParaRPr lang="fr-FR"/>
-          </a:p>
-        </p:txBody>
-      </p:sp>
-      <p:sp>
-        <p:nvSpPr>
-          <p:cNvPr id="23" name="Text 20">
-            <a:extLst>
-              <a:ext uri="{FF2B5EF4-FFF2-40B4-BE49-F238E27FC236}">
-                <a16:creationId xmlns:a16="http://schemas.microsoft.com/office/drawing/2014/main" id="{216ABF5F-0BAE-52CE-E7D8-AFFF05499125}"/>
-              </a:ext>
-            </a:extLst>
-          </p:cNvPr>
-          <p:cNvSpPr/>
-          <p:nvPr/>
-        </p:nvSpPr>
-        <p:spPr>
-          <a:xfrm>
-            <a:off x="6461260" y="1627000"/>
-            <a:ext cx="1961923" cy="482411"/>
-          </a:xfrm>
-          <a:prstGeom prst="rect">
-            <a:avLst/>
-          </a:prstGeom>
-          <a:noFill/>
-          <a:ln/>
-        </p:spPr>
-        <p:txBody>
-          <a:bodyPr wrap="square" lIns="0" tIns="0" rIns="0" bIns="0" rtlCol="0" anchor="ctr"/>
-          <a:lstStyle/>
-          <a:p>
-            <a:pPr marL="0" indent="0">
-              <a:buNone/>
-            </a:pPr>
-            <a:r>
-              <a:rPr lang="en-US" sz="1700" dirty="0" err="1">
-                <a:solidFill>
-                  <a:srgbClr val="92400E"/>
-                </a:solidFill>
-                <a:ea typeface="+mn-lt"/>
-                <a:cs typeface="+mn-lt"/>
-              </a:rPr>
-              <a:t>Avantages</a:t>
-            </a:r>
-            <a:endParaRPr lang="fr-FR" dirty="0" err="1"/>
-          </a:p>
-        </p:txBody>
-      </p:sp>
-      <p:sp>
-        <p:nvSpPr>
-          <p:cNvPr id="25" name="Text 21">
-            <a:extLst>
-              <a:ext uri="{FF2B5EF4-FFF2-40B4-BE49-F238E27FC236}">
-                <a16:creationId xmlns:a16="http://schemas.microsoft.com/office/drawing/2014/main" id="{1531CF4E-7477-6439-E429-C8F623B92207}"/>
-              </a:ext>
-            </a:extLst>
-          </p:cNvPr>
-          <p:cNvSpPr/>
-          <p:nvPr/>
-        </p:nvSpPr>
-        <p:spPr>
-          <a:xfrm>
-            <a:off x="6461260" y="2100000"/>
-            <a:ext cx="2542910" cy="1327515"/>
-          </a:xfrm>
-          <a:prstGeom prst="rect">
-            <a:avLst/>
-          </a:prstGeom>
-          <a:noFill/>
-          <a:ln/>
-        </p:spPr>
-        <p:txBody>
-          <a:bodyPr wrap="square" lIns="0" tIns="0" rIns="0" bIns="0" rtlCol="0" anchor="ctr">
-            <a:normAutofit/>
-          </a:bodyPr>
-          <a:lstStyle/>
-          <a:p>
-            <a:pPr marL="285750" indent="-285750">
-              <a:buFont typeface="Calibri"/>
-              <a:buChar char="-"/>
-            </a:pPr>
-            <a:r>
-              <a:rPr lang="en-US" sz="1400" dirty="0" err="1">
-                <a:solidFill>
-                  <a:srgbClr val="0F172A"/>
-                </a:solidFill>
-                <a:ea typeface="+mn-lt"/>
-                <a:cs typeface="+mn-lt"/>
-              </a:rPr>
-              <a:t>Robuste</a:t>
-            </a:r>
-            <a:endParaRPr lang="fr-FR" sz="1400" dirty="0" err="1"/>
-          </a:p>
-          <a:p>
-            <a:pPr marL="285750" indent="-285750">
-              <a:buFont typeface="Calibri"/>
-              <a:buChar char="-"/>
-            </a:pPr>
-            <a:r>
-              <a:rPr lang="en-US" sz="1400">
-                <a:solidFill>
-                  <a:srgbClr val="0F172A"/>
-                </a:solidFill>
-                <a:ea typeface="+mn-lt"/>
-                <a:cs typeface="+mn-lt"/>
-              </a:rPr>
-              <a:t>Performant</a:t>
-            </a:r>
-            <a:endParaRPr lang="en-US" sz="1400" dirty="0">
-              <a:solidFill>
-                <a:srgbClr val="0F172A"/>
-              </a:solidFill>
-              <a:ea typeface="+mn-lt"/>
-              <a:cs typeface="+mn-lt"/>
-            </a:endParaRPr>
-          </a:p>
-          <a:p>
-            <a:pPr marL="285750" indent="-285750">
-              <a:buFont typeface="Calibri"/>
-              <a:buChar char="-"/>
-            </a:pPr>
-            <a:r>
-              <a:rPr lang="en-US" sz="1400" dirty="0">
-                <a:solidFill>
-                  <a:srgbClr val="0F172A"/>
-                </a:solidFill>
-                <a:ea typeface="+mn-lt"/>
-                <a:cs typeface="+mn-lt"/>
-              </a:rPr>
-              <a:t>Non </a:t>
-            </a:r>
-            <a:r>
-              <a:rPr lang="en-US" sz="1400" dirty="0" err="1">
-                <a:solidFill>
-                  <a:srgbClr val="0F172A"/>
-                </a:solidFill>
-                <a:ea typeface="+mn-lt"/>
-                <a:cs typeface="+mn-lt"/>
-              </a:rPr>
-              <a:t>linéaire</a:t>
-            </a:r>
-            <a:r>
-              <a:rPr lang="en-US" sz="1400" dirty="0">
-                <a:solidFill>
-                  <a:srgbClr val="0F172A"/>
-                </a:solidFill>
-                <a:ea typeface="+mn-lt"/>
-                <a:cs typeface="+mn-lt"/>
-              </a:rPr>
-              <a:t> (</a:t>
-            </a:r>
-            <a:r>
-              <a:rPr lang="en-US" sz="1400" dirty="0" err="1">
-                <a:solidFill>
-                  <a:srgbClr val="0F172A"/>
-                </a:solidFill>
-                <a:ea typeface="+mn-lt"/>
-                <a:cs typeface="+mn-lt"/>
-              </a:rPr>
-              <a:t>capte</a:t>
-            </a:r>
-            <a:r>
-              <a:rPr lang="en-US" sz="1400" dirty="0">
-                <a:solidFill>
-                  <a:srgbClr val="0F172A"/>
-                </a:solidFill>
-                <a:ea typeface="+mn-lt"/>
-                <a:cs typeface="+mn-lt"/>
-              </a:rPr>
-              <a:t> des relations complexes)</a:t>
-            </a:r>
-          </a:p>
-          <a:p>
-            <a:pPr marL="285750" indent="-285750">
-              <a:buFont typeface="Calibri"/>
-              <a:buChar char="-"/>
-            </a:pPr>
-            <a:r>
-              <a:rPr lang="en-US" sz="1400" b="1" dirty="0" err="1">
-                <a:solidFill>
-                  <a:srgbClr val="0F172A"/>
-                </a:solidFill>
-                <a:ea typeface="+mn-lt"/>
-                <a:cs typeface="+mn-lt"/>
-              </a:rPr>
-              <a:t>Adapté</a:t>
-            </a:r>
-            <a:r>
-              <a:rPr lang="en-US" sz="1400" b="1" dirty="0">
-                <a:solidFill>
-                  <a:srgbClr val="0F172A"/>
-                </a:solidFill>
-                <a:ea typeface="+mn-lt"/>
-                <a:cs typeface="+mn-lt"/>
-              </a:rPr>
-              <a:t> au </a:t>
-            </a:r>
-            <a:r>
-              <a:rPr lang="en-US" sz="1400" b="1" dirty="0" err="1">
-                <a:solidFill>
-                  <a:srgbClr val="0F172A"/>
-                </a:solidFill>
-                <a:ea typeface="+mn-lt"/>
-                <a:cs typeface="+mn-lt"/>
-              </a:rPr>
-              <a:t>déséquilibre</a:t>
-            </a:r>
-            <a:endParaRPr lang="en-US" sz="1400" b="1">
-              <a:solidFill>
-                <a:srgbClr val="0F172A"/>
-              </a:solidFill>
-              <a:ea typeface="+mn-lt"/>
-              <a:cs typeface="+mn-lt"/>
-            </a:endParaRPr>
-          </a:p>
-          <a:p>
-            <a:pPr marL="285750" indent="-285750">
-              <a:buFont typeface="Calibri"/>
-              <a:buChar char="-"/>
-            </a:pPr>
-            <a:endParaRPr lang="en-US" sz="1400" dirty="0">
-              <a:solidFill>
-                <a:srgbClr val="0F172A"/>
-              </a:solidFill>
-              <a:ea typeface="+mn-lt"/>
-              <a:cs typeface="+mn-lt"/>
-            </a:endParaRPr>
-          </a:p>
-        </p:txBody>
-      </p:sp>
-      <p:sp>
-        <p:nvSpPr>
-          <p:cNvPr id="26" name="Text 20">
-            <a:extLst>
-              <a:ext uri="{FF2B5EF4-FFF2-40B4-BE49-F238E27FC236}">
-                <a16:creationId xmlns:a16="http://schemas.microsoft.com/office/drawing/2014/main" id="{B6643C11-5321-5849-E829-2284CB4C0EB3}"/>
-              </a:ext>
-            </a:extLst>
-          </p:cNvPr>
-          <p:cNvSpPr/>
-          <p:nvPr/>
-        </p:nvSpPr>
-        <p:spPr>
-          <a:xfrm>
-            <a:off x="9447684" y="1627000"/>
-            <a:ext cx="1961923" cy="482411"/>
-          </a:xfrm>
-          <a:prstGeom prst="rect">
-            <a:avLst/>
-          </a:prstGeom>
-          <a:noFill/>
-          <a:ln/>
-        </p:spPr>
-        <p:txBody>
-          <a:bodyPr wrap="square" lIns="0" tIns="0" rIns="0" bIns="0" rtlCol="0" anchor="ctr"/>
-          <a:lstStyle/>
-          <a:p>
-            <a:pPr marL="0" indent="0">
-              <a:buNone/>
-            </a:pPr>
-            <a:r>
-              <a:rPr lang="en-US" sz="1700" dirty="0" err="1">
-                <a:solidFill>
-                  <a:srgbClr val="92400E"/>
-                </a:solidFill>
-                <a:ea typeface="+mn-lt"/>
-                <a:cs typeface="+mn-lt"/>
-              </a:rPr>
-              <a:t>Inconvéniants</a:t>
-            </a:r>
-            <a:endParaRPr lang="fr-FR" dirty="0" err="1"/>
-          </a:p>
-        </p:txBody>
-      </p:sp>
-      <p:sp>
-        <p:nvSpPr>
-          <p:cNvPr id="27" name="Text 21">
-            <a:extLst>
-              <a:ext uri="{FF2B5EF4-FFF2-40B4-BE49-F238E27FC236}">
-                <a16:creationId xmlns:a16="http://schemas.microsoft.com/office/drawing/2014/main" id="{B476F8AE-14C1-9D59-CF78-4759CB6498F6}"/>
-              </a:ext>
-            </a:extLst>
-          </p:cNvPr>
-          <p:cNvSpPr/>
-          <p:nvPr/>
-        </p:nvSpPr>
-        <p:spPr>
-          <a:xfrm>
-            <a:off x="9286047" y="1980000"/>
-            <a:ext cx="1962981" cy="1327515"/>
-          </a:xfrm>
-          <a:prstGeom prst="rect">
-            <a:avLst/>
-          </a:prstGeom>
-          <a:noFill/>
-          <a:ln/>
-        </p:spPr>
-        <p:txBody>
-          <a:bodyPr wrap="square" lIns="0" tIns="0" rIns="0" bIns="0" rtlCol="0" anchor="ctr">
-            <a:normAutofit/>
-          </a:bodyPr>
-          <a:lstStyle/>
-          <a:p>
-            <a:pPr marL="285750" indent="-285750">
-              <a:buFont typeface="Calibri"/>
-              <a:buChar char="-"/>
-            </a:pPr>
-            <a:r>
-              <a:rPr lang="en-US" sz="1400" dirty="0" err="1">
-                <a:solidFill>
-                  <a:srgbClr val="0F172A"/>
-                </a:solidFill>
-                <a:ea typeface="+mn-lt"/>
-                <a:cs typeface="+mn-lt"/>
-              </a:rPr>
-              <a:t>peut</a:t>
-            </a:r>
-            <a:r>
-              <a:rPr lang="en-US" sz="1400" dirty="0">
-                <a:solidFill>
-                  <a:srgbClr val="0F172A"/>
-                </a:solidFill>
-                <a:ea typeface="+mn-lt"/>
-                <a:cs typeface="+mn-lt"/>
-              </a:rPr>
-              <a:t> </a:t>
-            </a:r>
-            <a:r>
-              <a:rPr lang="en-US" sz="1400" dirty="0" err="1">
-                <a:solidFill>
-                  <a:srgbClr val="0F172A"/>
-                </a:solidFill>
-                <a:ea typeface="+mn-lt"/>
-                <a:cs typeface="+mn-lt"/>
-              </a:rPr>
-              <a:t>générer</a:t>
-            </a:r>
-            <a:r>
-              <a:rPr lang="en-US" sz="1400" dirty="0">
-                <a:solidFill>
-                  <a:srgbClr val="0F172A"/>
-                </a:solidFill>
-                <a:ea typeface="+mn-lt"/>
-                <a:cs typeface="+mn-lt"/>
-              </a:rPr>
-              <a:t> plus de faux </a:t>
-            </a:r>
-            <a:r>
-              <a:rPr lang="en-US" sz="1400" dirty="0" err="1">
-                <a:solidFill>
-                  <a:srgbClr val="0F172A"/>
-                </a:solidFill>
-                <a:ea typeface="+mn-lt"/>
-                <a:cs typeface="+mn-lt"/>
-              </a:rPr>
-              <a:t>positifs</a:t>
-            </a:r>
-            <a:r>
-              <a:rPr lang="en-US" sz="1400" dirty="0">
-                <a:solidFill>
-                  <a:srgbClr val="0F172A"/>
-                </a:solidFill>
-                <a:ea typeface="+mn-lt"/>
-                <a:cs typeface="+mn-lt"/>
-              </a:rPr>
-              <a:t> </a:t>
-            </a:r>
-            <a:r>
-              <a:rPr lang="en-US" sz="1400" dirty="0" err="1">
-                <a:solidFill>
-                  <a:srgbClr val="0F172A"/>
-                </a:solidFill>
-                <a:ea typeface="+mn-lt"/>
-                <a:cs typeface="+mn-lt"/>
-              </a:rPr>
-              <a:t>si</a:t>
-            </a:r>
-            <a:r>
-              <a:rPr lang="en-US" sz="1400" dirty="0">
-                <a:solidFill>
-                  <a:srgbClr val="0F172A"/>
-                </a:solidFill>
-                <a:ea typeface="+mn-lt"/>
-                <a:cs typeface="+mn-lt"/>
-              </a:rPr>
-              <a:t> on </a:t>
-            </a:r>
-            <a:r>
-              <a:rPr lang="en-US" sz="1400" dirty="0" err="1">
-                <a:solidFill>
-                  <a:srgbClr val="0F172A"/>
-                </a:solidFill>
-                <a:ea typeface="+mn-lt"/>
-                <a:cs typeface="+mn-lt"/>
-              </a:rPr>
-              <a:t>baisse</a:t>
-            </a:r>
-            <a:r>
-              <a:rPr lang="en-US" sz="1400" dirty="0">
-                <a:solidFill>
-                  <a:srgbClr val="0F172A"/>
-                </a:solidFill>
-                <a:ea typeface="+mn-lt"/>
-                <a:cs typeface="+mn-lt"/>
-              </a:rPr>
-              <a:t> beaucoup le </a:t>
-            </a:r>
-            <a:r>
-              <a:rPr lang="en-US" sz="1400" dirty="0" err="1">
-                <a:solidFill>
-                  <a:srgbClr val="0F172A"/>
-                </a:solidFill>
-                <a:ea typeface="+mn-lt"/>
-                <a:cs typeface="+mn-lt"/>
-              </a:rPr>
-              <a:t>seuil</a:t>
-            </a:r>
-            <a:r>
-              <a:rPr lang="en-US" sz="1400" dirty="0">
-                <a:solidFill>
-                  <a:srgbClr val="0F172A"/>
-                </a:solidFill>
-                <a:ea typeface="+mn-lt"/>
-                <a:cs typeface="+mn-lt"/>
-              </a:rPr>
-              <a:t> de </a:t>
-            </a:r>
-            <a:r>
-              <a:rPr lang="en-US" sz="1400" dirty="0" err="1">
-                <a:solidFill>
-                  <a:srgbClr val="0F172A"/>
-                </a:solidFill>
-                <a:ea typeface="+mn-lt"/>
-                <a:cs typeface="+mn-lt"/>
-              </a:rPr>
-              <a:t>décision</a:t>
-            </a:r>
-            <a:endParaRPr lang="fr-FR" sz="1400" dirty="0" err="1">
-              <a:solidFill>
-                <a:srgbClr val="000000"/>
-              </a:solidFill>
-            </a:endParaRPr>
-          </a:p>
-        </p:txBody>
-      </p:sp>
-      <p:sp>
-        <p:nvSpPr>
           <p:cNvPr id="9" name="Shape 6">
             <a:extLst>
               <a:ext uri="{FF2B5EF4-FFF2-40B4-BE49-F238E27FC236}">
@@ -14172,6 +13423,387 @@
           </a:p>
         </p:txBody>
       </p:sp>
+      <p:graphicFrame>
+        <p:nvGraphicFramePr>
+          <p:cNvPr id="5" name="Tableau 4">
+            <a:extLst>
+              <a:ext uri="{FF2B5EF4-FFF2-40B4-BE49-F238E27FC236}">
+                <a16:creationId xmlns:a16="http://schemas.microsoft.com/office/drawing/2014/main" id="{9F5C4994-986B-35A0-60FA-D5A477C249C4}"/>
+              </a:ext>
+            </a:extLst>
+          </p:cNvPr>
+          <p:cNvGraphicFramePr>
+            <a:graphicFrameLocks noGrp="1"/>
+          </p:cNvGraphicFramePr>
+          <p:nvPr>
+            <p:extLst>
+              <p:ext uri="{D42A27DB-BD31-4B8C-83A1-F6EECF244321}">
+                <p14:modId xmlns:p14="http://schemas.microsoft.com/office/powerpoint/2010/main" val="1116755466"/>
+              </p:ext>
+            </p:extLst>
+          </p:nvPr>
+        </p:nvGraphicFramePr>
+        <p:xfrm>
+          <a:off x="5998616" y="1653490"/>
+          <a:ext cx="5797144" cy="1676573"/>
+        </p:xfrm>
+        <a:graphic>
+          <a:graphicData uri="http://schemas.openxmlformats.org/drawingml/2006/table">
+            <a:tbl>
+              <a:tblPr firstRow="1" bandRow="1">
+                <a:tableStyleId>{073A0DAA-6AF3-43AB-8588-CEC1D06C72B9}</a:tableStyleId>
+              </a:tblPr>
+              <a:tblGrid>
+                <a:gridCol w="2898572">
+                  <a:extLst>
+                    <a:ext uri="{9D8B030D-6E8A-4147-A177-3AD203B41FA5}">
+                      <a16:colId xmlns:a16="http://schemas.microsoft.com/office/drawing/2014/main" val="3095843017"/>
+                    </a:ext>
+                  </a:extLst>
+                </a:gridCol>
+                <a:gridCol w="2898572">
+                  <a:extLst>
+                    <a:ext uri="{9D8B030D-6E8A-4147-A177-3AD203B41FA5}">
+                      <a16:colId xmlns:a16="http://schemas.microsoft.com/office/drawing/2014/main" val="1561732748"/>
+                    </a:ext>
+                  </a:extLst>
+                </a:gridCol>
+              </a:tblGrid>
+              <a:tr h="365933">
+                <a:tc>
+                  <a:txBody>
+                    <a:bodyPr/>
+                    <a:lstStyle/>
+                    <a:p>
+                      <a:r>
+                        <a:rPr lang="fr-FR" dirty="0"/>
+                        <a:t>Avantages</a:t>
+                      </a:r>
+                    </a:p>
+                  </a:txBody>
+                  <a:tcPr/>
+                </a:tc>
+                <a:tc>
+                  <a:txBody>
+                    <a:bodyPr/>
+                    <a:lstStyle/>
+                    <a:p>
+                      <a:r>
+                        <a:rPr lang="en-US" sz="1800" dirty="0" err="1">
+                          <a:solidFill>
+                            <a:schemeClr val="bg1"/>
+                          </a:solidFill>
+                          <a:ea typeface="+mn-lt"/>
+                          <a:cs typeface="+mn-lt"/>
+                        </a:rPr>
+                        <a:t>Inconvénients</a:t>
+                      </a:r>
+                      <a:endParaRPr lang="fr-FR" dirty="0">
+                        <a:solidFill>
+                          <a:schemeClr val="bg1"/>
+                        </a:solidFill>
+                      </a:endParaRPr>
+                    </a:p>
+                  </a:txBody>
+                  <a:tcPr/>
+                </a:tc>
+                <a:extLst>
+                  <a:ext uri="{0D108BD9-81ED-4DB2-BD59-A6C34878D82A}">
+                    <a16:rowId xmlns:a16="http://schemas.microsoft.com/office/drawing/2014/main" val="3615889654"/>
+                  </a:ext>
+                </a:extLst>
+              </a:tr>
+              <a:tr h="370840">
+                <a:tc>
+                  <a:txBody>
+                    <a:bodyPr/>
+                    <a:lstStyle/>
+                    <a:p>
+                      <a:pPr marL="285750" indent="-285750">
+                        <a:buFont typeface="Calibri"/>
+                        <a:buChar char="-"/>
+                      </a:pPr>
+                      <a:r>
+                        <a:rPr lang="en-US" sz="1600" dirty="0" err="1">
+                          <a:solidFill>
+                            <a:srgbClr val="0F172A"/>
+                          </a:solidFill>
+                          <a:ea typeface="+mn-lt"/>
+                          <a:cs typeface="+mn-lt"/>
+                        </a:rPr>
+                        <a:t>Robuste</a:t>
+                      </a:r>
+                      <a:endParaRPr lang="fr-FR" sz="1600" dirty="0"/>
+                    </a:p>
+                    <a:p>
+                      <a:pPr marL="285750" indent="-285750">
+                        <a:buFont typeface="Calibri"/>
+                        <a:buChar char="-"/>
+                      </a:pPr>
+                      <a:r>
+                        <a:rPr lang="en-US" sz="1600" dirty="0">
+                          <a:solidFill>
+                            <a:srgbClr val="0F172A"/>
+                          </a:solidFill>
+                          <a:ea typeface="+mn-lt"/>
+                          <a:cs typeface="+mn-lt"/>
+                        </a:rPr>
+                        <a:t>Performant</a:t>
+                      </a:r>
+                    </a:p>
+                    <a:p>
+                      <a:pPr marL="285750" indent="-285750">
+                        <a:buFont typeface="Calibri"/>
+                        <a:buChar char="-"/>
+                      </a:pPr>
+                      <a:r>
+                        <a:rPr lang="en-US" sz="1600" dirty="0">
+                          <a:solidFill>
+                            <a:srgbClr val="0F172A"/>
+                          </a:solidFill>
+                          <a:ea typeface="+mn-lt"/>
+                          <a:cs typeface="+mn-lt"/>
+                        </a:rPr>
+                        <a:t>Non </a:t>
+                      </a:r>
+                      <a:r>
+                        <a:rPr lang="en-US" sz="1600" dirty="0" err="1">
+                          <a:solidFill>
+                            <a:srgbClr val="0F172A"/>
+                          </a:solidFill>
+                          <a:ea typeface="+mn-lt"/>
+                          <a:cs typeface="+mn-lt"/>
+                        </a:rPr>
+                        <a:t>linéaire</a:t>
+                      </a:r>
+                      <a:r>
+                        <a:rPr lang="en-US" sz="1600" dirty="0">
+                          <a:solidFill>
+                            <a:srgbClr val="0F172A"/>
+                          </a:solidFill>
+                          <a:ea typeface="+mn-lt"/>
+                          <a:cs typeface="+mn-lt"/>
+                        </a:rPr>
+                        <a:t> (</a:t>
+                      </a:r>
+                      <a:r>
+                        <a:rPr lang="en-US" sz="1600" dirty="0" err="1">
+                          <a:solidFill>
+                            <a:srgbClr val="0F172A"/>
+                          </a:solidFill>
+                          <a:ea typeface="+mn-lt"/>
+                          <a:cs typeface="+mn-lt"/>
+                        </a:rPr>
+                        <a:t>capte</a:t>
+                      </a:r>
+                      <a:r>
+                        <a:rPr lang="en-US" sz="1600" dirty="0">
+                          <a:solidFill>
+                            <a:srgbClr val="0F172A"/>
+                          </a:solidFill>
+                          <a:ea typeface="+mn-lt"/>
+                          <a:cs typeface="+mn-lt"/>
+                        </a:rPr>
+                        <a:t> des relations complexes)</a:t>
+                      </a:r>
+                    </a:p>
+                    <a:p>
+                      <a:pPr marL="285750" indent="-285750">
+                        <a:buFont typeface="Calibri"/>
+                        <a:buChar char="-"/>
+                      </a:pPr>
+                      <a:r>
+                        <a:rPr lang="en-US" sz="1600" b="1" dirty="0">
+                          <a:solidFill>
+                            <a:srgbClr val="0F172A"/>
+                          </a:solidFill>
+                          <a:ea typeface="+mn-lt"/>
+                          <a:cs typeface="+mn-lt"/>
+                        </a:rPr>
+                        <a:t>Adapté au </a:t>
+                      </a:r>
+                      <a:r>
+                        <a:rPr lang="en-US" sz="1600" b="1" dirty="0" err="1">
+                          <a:solidFill>
+                            <a:srgbClr val="0F172A"/>
+                          </a:solidFill>
+                          <a:ea typeface="+mn-lt"/>
+                          <a:cs typeface="+mn-lt"/>
+                        </a:rPr>
+                        <a:t>déséquilibre</a:t>
+                      </a:r>
+                      <a:endParaRPr lang="en-US" sz="1600" b="1" dirty="0">
+                        <a:solidFill>
+                          <a:srgbClr val="0F172A"/>
+                        </a:solidFill>
+                        <a:ea typeface="+mn-lt"/>
+                        <a:cs typeface="+mn-lt"/>
+                      </a:endParaRPr>
+                    </a:p>
+                  </a:txBody>
+                  <a:tcPr/>
+                </a:tc>
+                <a:tc>
+                  <a:txBody>
+                    <a:bodyPr/>
+                    <a:lstStyle/>
+                    <a:p>
+                      <a:pPr marL="285750" indent="-285750">
+                        <a:buFont typeface="Calibri"/>
+                        <a:buChar char="-"/>
+                      </a:pPr>
+                      <a:r>
+                        <a:rPr lang="en-US" sz="1600" dirty="0" err="1">
+                          <a:solidFill>
+                            <a:srgbClr val="0F172A"/>
+                          </a:solidFill>
+                          <a:ea typeface="+mn-lt"/>
+                          <a:cs typeface="+mn-lt"/>
+                        </a:rPr>
+                        <a:t>peut</a:t>
+                      </a:r>
+                      <a:r>
+                        <a:rPr lang="en-US" sz="1600" dirty="0">
+                          <a:solidFill>
+                            <a:srgbClr val="0F172A"/>
+                          </a:solidFill>
+                          <a:ea typeface="+mn-lt"/>
+                          <a:cs typeface="+mn-lt"/>
+                        </a:rPr>
+                        <a:t> </a:t>
+                      </a:r>
+                      <a:r>
+                        <a:rPr lang="en-US" sz="1600" dirty="0" err="1">
+                          <a:solidFill>
+                            <a:srgbClr val="0F172A"/>
+                          </a:solidFill>
+                          <a:ea typeface="+mn-lt"/>
+                          <a:cs typeface="+mn-lt"/>
+                        </a:rPr>
+                        <a:t>générer</a:t>
+                      </a:r>
+                      <a:r>
+                        <a:rPr lang="en-US" sz="1600" dirty="0">
+                          <a:solidFill>
+                            <a:srgbClr val="0F172A"/>
+                          </a:solidFill>
+                          <a:ea typeface="+mn-lt"/>
+                          <a:cs typeface="+mn-lt"/>
+                        </a:rPr>
+                        <a:t> plus de faux </a:t>
+                      </a:r>
+                      <a:r>
+                        <a:rPr lang="en-US" sz="1600" dirty="0" err="1">
+                          <a:solidFill>
+                            <a:srgbClr val="0F172A"/>
+                          </a:solidFill>
+                          <a:ea typeface="+mn-lt"/>
+                          <a:cs typeface="+mn-lt"/>
+                        </a:rPr>
+                        <a:t>positifs</a:t>
+                      </a:r>
+                      <a:r>
+                        <a:rPr lang="en-US" sz="1600" dirty="0">
+                          <a:solidFill>
+                            <a:srgbClr val="0F172A"/>
+                          </a:solidFill>
+                          <a:ea typeface="+mn-lt"/>
+                          <a:cs typeface="+mn-lt"/>
+                        </a:rPr>
+                        <a:t> </a:t>
+                      </a:r>
+                      <a:r>
+                        <a:rPr lang="en-US" sz="1600" dirty="0" err="1">
+                          <a:solidFill>
+                            <a:srgbClr val="0F172A"/>
+                          </a:solidFill>
+                          <a:ea typeface="+mn-lt"/>
+                          <a:cs typeface="+mn-lt"/>
+                        </a:rPr>
+                        <a:t>si</a:t>
+                      </a:r>
+                      <a:r>
+                        <a:rPr lang="en-US" sz="1600" dirty="0">
+                          <a:solidFill>
+                            <a:srgbClr val="0F172A"/>
+                          </a:solidFill>
+                          <a:ea typeface="+mn-lt"/>
+                          <a:cs typeface="+mn-lt"/>
+                        </a:rPr>
+                        <a:t> on </a:t>
+                      </a:r>
+                      <a:r>
+                        <a:rPr lang="en-US" sz="1600" dirty="0" err="1">
+                          <a:solidFill>
+                            <a:srgbClr val="0F172A"/>
+                          </a:solidFill>
+                          <a:ea typeface="+mn-lt"/>
+                          <a:cs typeface="+mn-lt"/>
+                        </a:rPr>
+                        <a:t>baisse</a:t>
+                      </a:r>
+                      <a:r>
+                        <a:rPr lang="en-US" sz="1600" dirty="0">
+                          <a:solidFill>
+                            <a:srgbClr val="0F172A"/>
+                          </a:solidFill>
+                          <a:ea typeface="+mn-lt"/>
+                          <a:cs typeface="+mn-lt"/>
+                        </a:rPr>
+                        <a:t> beaucoup le </a:t>
+                      </a:r>
+                      <a:r>
+                        <a:rPr lang="en-US" sz="1600" dirty="0" err="1">
+                          <a:solidFill>
+                            <a:srgbClr val="0F172A"/>
+                          </a:solidFill>
+                          <a:ea typeface="+mn-lt"/>
+                          <a:cs typeface="+mn-lt"/>
+                        </a:rPr>
+                        <a:t>seuil</a:t>
+                      </a:r>
+                      <a:r>
+                        <a:rPr lang="en-US" sz="1600" dirty="0">
+                          <a:solidFill>
+                            <a:srgbClr val="0F172A"/>
+                          </a:solidFill>
+                          <a:ea typeface="+mn-lt"/>
+                          <a:cs typeface="+mn-lt"/>
+                        </a:rPr>
+                        <a:t> de </a:t>
+                      </a:r>
+                      <a:r>
+                        <a:rPr lang="en-US" sz="1600" dirty="0" err="1">
+                          <a:solidFill>
+                            <a:srgbClr val="0F172A"/>
+                          </a:solidFill>
+                          <a:ea typeface="+mn-lt"/>
+                          <a:cs typeface="+mn-lt"/>
+                        </a:rPr>
+                        <a:t>décision</a:t>
+                      </a:r>
+                      <a:endParaRPr lang="fr-FR" sz="1600" dirty="0">
+                        <a:solidFill>
+                          <a:srgbClr val="000000"/>
+                        </a:solidFill>
+                      </a:endParaRPr>
+                    </a:p>
+                    <a:p>
+                      <a:endParaRPr lang="fr-FR" sz="1600" dirty="0"/>
+                    </a:p>
+                  </a:txBody>
+                  <a:tcPr/>
+                </a:tc>
+                <a:extLst>
+                  <a:ext uri="{0D108BD9-81ED-4DB2-BD59-A6C34878D82A}">
+                    <a16:rowId xmlns:a16="http://schemas.microsoft.com/office/drawing/2014/main" val="628995668"/>
+                  </a:ext>
+                </a:extLst>
+              </a:tr>
+            </a:tbl>
+          </a:graphicData>
+        </a:graphic>
+      </p:graphicFrame>
     </p:spTree>
     <p:extLst>
       <p:ext uri="{BB962C8B-B14F-4D97-AF65-F5344CB8AC3E}">
